--- a/media/module6/slides.pptx
+++ b/media/module6/slides.pptx
@@ -77,6 +77,18 @@
     <p:sldId id="325" r:id="rId77"/>
     <p:sldId id="326" r:id="rId78"/>
     <p:sldId id="327" r:id="rId79"/>
+    <p:sldId id="328" r:id="rId80"/>
+    <p:sldId id="329" r:id="rId81"/>
+    <p:sldId id="330" r:id="rId82"/>
+    <p:sldId id="331" r:id="rId83"/>
+    <p:sldId id="332" r:id="rId84"/>
+    <p:sldId id="333" r:id="rId85"/>
+    <p:sldId id="334" r:id="rId86"/>
+    <p:sldId id="335" r:id="rId87"/>
+    <p:sldId id="336" r:id="rId88"/>
+    <p:sldId id="337" r:id="rId89"/>
+    <p:sldId id="338" r:id="rId90"/>
+    <p:sldId id="339" r:id="rId91"/>
   </p:sldIdLst>
   <p:sldSz cx="12191695" cy="6858000" type="screen4x3"/>
   <p:notesSz cx="6858000" cy="9144000"/>
@@ -4518,6 +4530,636 @@
 </p:notes>
 </file>
 
+<file path=ppt/notesSlides/notesSlide61.xml><?xml version="1.0" encoding="utf-8"?>
+<p:notes xmlns:a="http://schemas.openxmlformats.org/drawingml/2006/main" xmlns:p="http://schemas.openxmlformats.org/presentationml/2006/main" xmlns:r="http://schemas.openxmlformats.org/officeDocument/2006/relationships">
+  <p:cSld>
+    <p:spTree>
+      <p:nvGrpSpPr>
+        <p:cNvPr id="1" name=""/>
+        <p:cNvGrpSpPr/>
+        <p:nvPr/>
+      </p:nvGrpSpPr>
+      <p:grpSpPr>
+        <a:xfrm>
+          <a:off x="0" y="0"/>
+          <a:ext cx="0" cy="0"/>
+          <a:chOff x="0" y="0"/>
+          <a:chExt cx="0" cy="0"/>
+        </a:xfrm>
+      </p:grpSpPr>
+      <p:sp>
+        <p:nvSpPr>
+          <p:cNvPr id="2" name="Slide Image Placeholder 1"/>
+          <p:cNvSpPr>
+            <a:spLocks noGrp="1"/>
+          </p:cNvSpPr>
+          <p:nvPr>
+            <p:ph type="sldImg" idx="2"/>
+          </p:nvPr>
+        </p:nvSpPr>
+        <p:spPr/>
+      </p:sp>
+      <p:sp>
+        <p:nvSpPr>
+          <p:cNvPr id="3" name="Notes Placeholder 2"/>
+          <p:cNvSpPr>
+            <a:spLocks noGrp="1"/>
+          </p:cNvSpPr>
+          <p:nvPr>
+            <p:ph type="body" idx="3" sz="quarter"/>
+          </p:nvPr>
+        </p:nvSpPr>
+        <p:spPr/>
+        <p:txBody>
+          <a:bodyPr/>
+          <a:lstStyle/>
+          <a:p>
+            <a:r>
+              <a:t>module6/examples/architecture/README.md</a:t>
+            </a:r>
+          </a:p>
+        </p:txBody>
+      </p:sp>
+      <p:sp>
+        <p:nvSpPr>
+          <p:cNvPr id="4" name="Slide Number Placeholder 3"/>
+          <p:cNvSpPr>
+            <a:spLocks noGrp="1"/>
+          </p:cNvSpPr>
+          <p:nvPr>
+            <p:ph type="sldNum" idx="5" sz="quarter"/>
+          </p:nvPr>
+        </p:nvSpPr>
+        <p:spPr/>
+      </p:sp>
+    </p:spTree>
+  </p:cSld>
+  <p:clrMapOvr>
+    <a:masterClrMapping/>
+  </p:clrMapOvr>
+</p:notes>
+</file>
+
+<file path=ppt/notesSlides/notesSlide62.xml><?xml version="1.0" encoding="utf-8"?>
+<p:notes xmlns:a="http://schemas.openxmlformats.org/drawingml/2006/main" xmlns:p="http://schemas.openxmlformats.org/presentationml/2006/main" xmlns:r="http://schemas.openxmlformats.org/officeDocument/2006/relationships">
+  <p:cSld>
+    <p:spTree>
+      <p:nvGrpSpPr>
+        <p:cNvPr id="1" name=""/>
+        <p:cNvGrpSpPr/>
+        <p:nvPr/>
+      </p:nvGrpSpPr>
+      <p:grpSpPr>
+        <a:xfrm>
+          <a:off x="0" y="0"/>
+          <a:ext cx="0" cy="0"/>
+          <a:chOff x="0" y="0"/>
+          <a:chExt cx="0" cy="0"/>
+        </a:xfrm>
+      </p:grpSpPr>
+      <p:sp>
+        <p:nvSpPr>
+          <p:cNvPr id="2" name="Slide Image Placeholder 1"/>
+          <p:cNvSpPr>
+            <a:spLocks noGrp="1"/>
+          </p:cNvSpPr>
+          <p:nvPr>
+            <p:ph type="sldImg" idx="2"/>
+          </p:nvPr>
+        </p:nvSpPr>
+        <p:spPr/>
+      </p:sp>
+      <p:sp>
+        <p:nvSpPr>
+          <p:cNvPr id="3" name="Notes Placeholder 2"/>
+          <p:cNvSpPr>
+            <a:spLocks noGrp="1"/>
+          </p:cNvSpPr>
+          <p:nvPr>
+            <p:ph type="body" idx="3" sz="quarter"/>
+          </p:nvPr>
+        </p:nvSpPr>
+        <p:spPr/>
+        <p:txBody>
+          <a:bodyPr/>
+          <a:lstStyle/>
+          <a:p>
+            <a:r>
+              <a:t>Hands-on: module6/examples/architecture/</a:t>
+            </a:r>
+          </a:p>
+        </p:txBody>
+      </p:sp>
+      <p:sp>
+        <p:nvSpPr>
+          <p:cNvPr id="4" name="Slide Number Placeholder 3"/>
+          <p:cNvSpPr>
+            <a:spLocks noGrp="1"/>
+          </p:cNvSpPr>
+          <p:nvPr>
+            <p:ph type="sldNum" idx="5" sz="quarter"/>
+          </p:nvPr>
+        </p:nvSpPr>
+        <p:spPr/>
+      </p:sp>
+    </p:spTree>
+  </p:cSld>
+  <p:clrMapOvr>
+    <a:masterClrMapping/>
+  </p:clrMapOvr>
+</p:notes>
+</file>
+
+<file path=ppt/notesSlides/notesSlide63.xml><?xml version="1.0" encoding="utf-8"?>
+<p:notes xmlns:a="http://schemas.openxmlformats.org/drawingml/2006/main" xmlns:p="http://schemas.openxmlformats.org/presentationml/2006/main" xmlns:r="http://schemas.openxmlformats.org/officeDocument/2006/relationships">
+  <p:cSld>
+    <p:spTree>
+      <p:nvGrpSpPr>
+        <p:cNvPr id="1" name=""/>
+        <p:cNvGrpSpPr/>
+        <p:nvPr/>
+      </p:nvGrpSpPr>
+      <p:grpSpPr>
+        <a:xfrm>
+          <a:off x="0" y="0"/>
+          <a:ext cx="0" cy="0"/>
+          <a:chOff x="0" y="0"/>
+          <a:chExt cx="0" cy="0"/>
+        </a:xfrm>
+      </p:grpSpPr>
+      <p:sp>
+        <p:nvSpPr>
+          <p:cNvPr id="2" name="Slide Image Placeholder 1"/>
+          <p:cNvSpPr>
+            <a:spLocks noGrp="1"/>
+          </p:cNvSpPr>
+          <p:nvPr>
+            <p:ph type="sldImg" idx="2"/>
+          </p:nvPr>
+        </p:nvSpPr>
+        <p:spPr/>
+      </p:sp>
+      <p:sp>
+        <p:nvSpPr>
+          <p:cNvPr id="3" name="Notes Placeholder 2"/>
+          <p:cNvSpPr>
+            <a:spLocks noGrp="1"/>
+          </p:cNvSpPr>
+          <p:nvPr>
+            <p:ph type="body" idx="3" sz="quarter"/>
+          </p:nvPr>
+        </p:nvSpPr>
+        <p:spPr/>
+        <p:txBody>
+          <a:bodyPr/>
+          <a:lstStyle/>
+          <a:p>
+            <a:r>
+              <a:t>module6/examples/multi_agent/README.md</a:t>
+            </a:r>
+          </a:p>
+        </p:txBody>
+      </p:sp>
+      <p:sp>
+        <p:nvSpPr>
+          <p:cNvPr id="4" name="Slide Number Placeholder 3"/>
+          <p:cNvSpPr>
+            <a:spLocks noGrp="1"/>
+          </p:cNvSpPr>
+          <p:nvPr>
+            <p:ph type="sldNum" idx="5" sz="quarter"/>
+          </p:nvPr>
+        </p:nvSpPr>
+        <p:spPr/>
+      </p:sp>
+    </p:spTree>
+  </p:cSld>
+  <p:clrMapOvr>
+    <a:masterClrMapping/>
+  </p:clrMapOvr>
+</p:notes>
+</file>
+
+<file path=ppt/notesSlides/notesSlide64.xml><?xml version="1.0" encoding="utf-8"?>
+<p:notes xmlns:a="http://schemas.openxmlformats.org/drawingml/2006/main" xmlns:p="http://schemas.openxmlformats.org/presentationml/2006/main" xmlns:r="http://schemas.openxmlformats.org/officeDocument/2006/relationships">
+  <p:cSld>
+    <p:spTree>
+      <p:nvGrpSpPr>
+        <p:cNvPr id="1" name=""/>
+        <p:cNvGrpSpPr/>
+        <p:nvPr/>
+      </p:nvGrpSpPr>
+      <p:grpSpPr>
+        <a:xfrm>
+          <a:off x="0" y="0"/>
+          <a:ext cx="0" cy="0"/>
+          <a:chOff x="0" y="0"/>
+          <a:chExt cx="0" cy="0"/>
+        </a:xfrm>
+      </p:grpSpPr>
+      <p:sp>
+        <p:nvSpPr>
+          <p:cNvPr id="2" name="Slide Image Placeholder 1"/>
+          <p:cNvSpPr>
+            <a:spLocks noGrp="1"/>
+          </p:cNvSpPr>
+          <p:nvPr>
+            <p:ph type="sldImg" idx="2"/>
+          </p:nvPr>
+        </p:nvSpPr>
+        <p:spPr/>
+      </p:sp>
+      <p:sp>
+        <p:nvSpPr>
+          <p:cNvPr id="3" name="Notes Placeholder 2"/>
+          <p:cNvSpPr>
+            <a:spLocks noGrp="1"/>
+          </p:cNvSpPr>
+          <p:nvPr>
+            <p:ph type="body" idx="3" sz="quarter"/>
+          </p:nvPr>
+        </p:nvSpPr>
+        <p:spPr/>
+        <p:txBody>
+          <a:bodyPr/>
+          <a:lstStyle/>
+          <a:p>
+            <a:r>
+              <a:t>Hands-on: module6/examples/multi_agent/</a:t>
+            </a:r>
+          </a:p>
+        </p:txBody>
+      </p:sp>
+      <p:sp>
+        <p:nvSpPr>
+          <p:cNvPr id="4" name="Slide Number Placeholder 3"/>
+          <p:cNvSpPr>
+            <a:spLocks noGrp="1"/>
+          </p:cNvSpPr>
+          <p:nvPr>
+            <p:ph type="sldNum" idx="5" sz="quarter"/>
+          </p:nvPr>
+        </p:nvSpPr>
+        <p:spPr/>
+      </p:sp>
+    </p:spTree>
+  </p:cSld>
+  <p:clrMapOvr>
+    <a:masterClrMapping/>
+  </p:clrMapOvr>
+</p:notes>
+</file>
+
+<file path=ppt/notesSlides/notesSlide65.xml><?xml version="1.0" encoding="utf-8"?>
+<p:notes xmlns:a="http://schemas.openxmlformats.org/drawingml/2006/main" xmlns:p="http://schemas.openxmlformats.org/presentationml/2006/main" xmlns:r="http://schemas.openxmlformats.org/officeDocument/2006/relationships">
+  <p:cSld>
+    <p:spTree>
+      <p:nvGrpSpPr>
+        <p:cNvPr id="1" name=""/>
+        <p:cNvGrpSpPr/>
+        <p:nvPr/>
+      </p:nvGrpSpPr>
+      <p:grpSpPr>
+        <a:xfrm>
+          <a:off x="0" y="0"/>
+          <a:ext cx="0" cy="0"/>
+          <a:chOff x="0" y="0"/>
+          <a:chExt cx="0" cy="0"/>
+        </a:xfrm>
+      </p:grpSpPr>
+      <p:sp>
+        <p:nvSpPr>
+          <p:cNvPr id="2" name="Slide Image Placeholder 1"/>
+          <p:cNvSpPr>
+            <a:spLocks noGrp="1"/>
+          </p:cNvSpPr>
+          <p:nvPr>
+            <p:ph type="sldImg" idx="2"/>
+          </p:nvPr>
+        </p:nvSpPr>
+        <p:spPr/>
+      </p:sp>
+      <p:sp>
+        <p:nvSpPr>
+          <p:cNvPr id="3" name="Notes Placeholder 2"/>
+          <p:cNvSpPr>
+            <a:spLocks noGrp="1"/>
+          </p:cNvSpPr>
+          <p:nvPr>
+            <p:ph type="body" idx="3" sz="quarter"/>
+          </p:nvPr>
+        </p:nvSpPr>
+        <p:spPr/>
+        <p:txBody>
+          <a:bodyPr/>
+          <a:lstStyle/>
+          <a:p>
+            <a:r>
+              <a:t>module6/examples/protocol/README.md</a:t>
+            </a:r>
+          </a:p>
+        </p:txBody>
+      </p:sp>
+      <p:sp>
+        <p:nvSpPr>
+          <p:cNvPr id="4" name="Slide Number Placeholder 3"/>
+          <p:cNvSpPr>
+            <a:spLocks noGrp="1"/>
+          </p:cNvSpPr>
+          <p:nvPr>
+            <p:ph type="sldNum" idx="5" sz="quarter"/>
+          </p:nvPr>
+        </p:nvSpPr>
+        <p:spPr/>
+      </p:sp>
+    </p:spTree>
+  </p:cSld>
+  <p:clrMapOvr>
+    <a:masterClrMapping/>
+  </p:clrMapOvr>
+</p:notes>
+</file>
+
+<file path=ppt/notesSlides/notesSlide66.xml><?xml version="1.0" encoding="utf-8"?>
+<p:notes xmlns:a="http://schemas.openxmlformats.org/drawingml/2006/main" xmlns:p="http://schemas.openxmlformats.org/presentationml/2006/main" xmlns:r="http://schemas.openxmlformats.org/officeDocument/2006/relationships">
+  <p:cSld>
+    <p:spTree>
+      <p:nvGrpSpPr>
+        <p:cNvPr id="1" name=""/>
+        <p:cNvGrpSpPr/>
+        <p:nvPr/>
+      </p:nvGrpSpPr>
+      <p:grpSpPr>
+        <a:xfrm>
+          <a:off x="0" y="0"/>
+          <a:ext cx="0" cy="0"/>
+          <a:chOff x="0" y="0"/>
+          <a:chExt cx="0" cy="0"/>
+        </a:xfrm>
+      </p:grpSpPr>
+      <p:sp>
+        <p:nvSpPr>
+          <p:cNvPr id="2" name="Slide Image Placeholder 1"/>
+          <p:cNvSpPr>
+            <a:spLocks noGrp="1"/>
+          </p:cNvSpPr>
+          <p:nvPr>
+            <p:ph type="sldImg" idx="2"/>
+          </p:nvPr>
+        </p:nvSpPr>
+        <p:spPr/>
+      </p:sp>
+      <p:sp>
+        <p:nvSpPr>
+          <p:cNvPr id="3" name="Notes Placeholder 2"/>
+          <p:cNvSpPr>
+            <a:spLocks noGrp="1"/>
+          </p:cNvSpPr>
+          <p:nvPr>
+            <p:ph type="body" idx="3" sz="quarter"/>
+          </p:nvPr>
+        </p:nvSpPr>
+        <p:spPr/>
+        <p:txBody>
+          <a:bodyPr/>
+          <a:lstStyle/>
+          <a:p>
+            <a:r>
+              <a:t>Hands-on: module6/examples/protocol/</a:t>
+            </a:r>
+          </a:p>
+        </p:txBody>
+      </p:sp>
+      <p:sp>
+        <p:nvSpPr>
+          <p:cNvPr id="4" name="Slide Number Placeholder 3"/>
+          <p:cNvSpPr>
+            <a:spLocks noGrp="1"/>
+          </p:cNvSpPr>
+          <p:nvPr>
+            <p:ph type="sldNum" idx="5" sz="quarter"/>
+          </p:nvPr>
+        </p:nvSpPr>
+        <p:spPr/>
+      </p:sp>
+    </p:spTree>
+  </p:cSld>
+  <p:clrMapOvr>
+    <a:masterClrMapping/>
+  </p:clrMapOvr>
+</p:notes>
+</file>
+
+<file path=ppt/notesSlides/notesSlide67.xml><?xml version="1.0" encoding="utf-8"?>
+<p:notes xmlns:a="http://schemas.openxmlformats.org/drawingml/2006/main" xmlns:p="http://schemas.openxmlformats.org/presentationml/2006/main" xmlns:r="http://schemas.openxmlformats.org/officeDocument/2006/relationships">
+  <p:cSld>
+    <p:spTree>
+      <p:nvGrpSpPr>
+        <p:cNvPr id="1" name=""/>
+        <p:cNvGrpSpPr/>
+        <p:nvPr/>
+      </p:nvGrpSpPr>
+      <p:grpSpPr>
+        <a:xfrm>
+          <a:off x="0" y="0"/>
+          <a:ext cx="0" cy="0"/>
+          <a:chOff x="0" y="0"/>
+          <a:chExt cx="0" cy="0"/>
+        </a:xfrm>
+      </p:grpSpPr>
+      <p:sp>
+        <p:nvSpPr>
+          <p:cNvPr id="2" name="Slide Image Placeholder 1"/>
+          <p:cNvSpPr>
+            <a:spLocks noGrp="1"/>
+          </p:cNvSpPr>
+          <p:nvPr>
+            <p:ph type="sldImg" idx="2"/>
+          </p:nvPr>
+        </p:nvSpPr>
+        <p:spPr/>
+      </p:sp>
+      <p:sp>
+        <p:nvSpPr>
+          <p:cNvPr id="3" name="Notes Placeholder 2"/>
+          <p:cNvSpPr>
+            <a:spLocks noGrp="1"/>
+          </p:cNvSpPr>
+          <p:nvPr>
+            <p:ph type="body" idx="3" sz="quarter"/>
+          </p:nvPr>
+        </p:nvSpPr>
+        <p:spPr/>
+        <p:txBody>
+          <a:bodyPr/>
+          <a:lstStyle/>
+          <a:p>
+            <a:r>
+              <a:t>module6/examples/protocol_checkers/README.md</a:t>
+            </a:r>
+          </a:p>
+        </p:txBody>
+      </p:sp>
+      <p:sp>
+        <p:nvSpPr>
+          <p:cNvPr id="4" name="Slide Number Placeholder 3"/>
+          <p:cNvSpPr>
+            <a:spLocks noGrp="1"/>
+          </p:cNvSpPr>
+          <p:nvPr>
+            <p:ph type="sldNum" idx="5" sz="quarter"/>
+          </p:nvPr>
+        </p:nvSpPr>
+        <p:spPr/>
+      </p:sp>
+    </p:spTree>
+  </p:cSld>
+  <p:clrMapOvr>
+    <a:masterClrMapping/>
+  </p:clrMapOvr>
+</p:notes>
+</file>
+
+<file path=ppt/notesSlides/notesSlide68.xml><?xml version="1.0" encoding="utf-8"?>
+<p:notes xmlns:a="http://schemas.openxmlformats.org/drawingml/2006/main" xmlns:p="http://schemas.openxmlformats.org/presentationml/2006/main" xmlns:r="http://schemas.openxmlformats.org/officeDocument/2006/relationships">
+  <p:cSld>
+    <p:spTree>
+      <p:nvGrpSpPr>
+        <p:cNvPr id="1" name=""/>
+        <p:cNvGrpSpPr/>
+        <p:nvPr/>
+      </p:nvGrpSpPr>
+      <p:grpSpPr>
+        <a:xfrm>
+          <a:off x="0" y="0"/>
+          <a:ext cx="0" cy="0"/>
+          <a:chOff x="0" y="0"/>
+          <a:chExt cx="0" cy="0"/>
+        </a:xfrm>
+      </p:grpSpPr>
+      <p:sp>
+        <p:nvSpPr>
+          <p:cNvPr id="2" name="Slide Image Placeholder 1"/>
+          <p:cNvSpPr>
+            <a:spLocks noGrp="1"/>
+          </p:cNvSpPr>
+          <p:nvPr>
+            <p:ph type="sldImg" idx="2"/>
+          </p:nvPr>
+        </p:nvSpPr>
+        <p:spPr/>
+      </p:sp>
+      <p:sp>
+        <p:nvSpPr>
+          <p:cNvPr id="3" name="Notes Placeholder 2"/>
+          <p:cNvSpPr>
+            <a:spLocks noGrp="1"/>
+          </p:cNvSpPr>
+          <p:nvPr>
+            <p:ph type="body" idx="3" sz="quarter"/>
+          </p:nvPr>
+        </p:nvSpPr>
+        <p:spPr/>
+        <p:txBody>
+          <a:bodyPr/>
+          <a:lstStyle/>
+          <a:p>
+            <a:r>
+              <a:t>Hands-on: module6/examples/protocol_checkers/</a:t>
+            </a:r>
+          </a:p>
+        </p:txBody>
+      </p:sp>
+      <p:sp>
+        <p:nvSpPr>
+          <p:cNvPr id="4" name="Slide Number Placeholder 3"/>
+          <p:cNvSpPr>
+            <a:spLocks noGrp="1"/>
+          </p:cNvSpPr>
+          <p:nvPr>
+            <p:ph type="sldNum" idx="5" sz="quarter"/>
+          </p:nvPr>
+        </p:nvSpPr>
+        <p:spPr/>
+      </p:sp>
+    </p:spTree>
+  </p:cSld>
+  <p:clrMapOvr>
+    <a:masterClrMapping/>
+  </p:clrMapOvr>
+</p:notes>
+</file>
+
+<file path=ppt/notesSlides/notesSlide69.xml><?xml version="1.0" encoding="utf-8"?>
+<p:notes xmlns:a="http://schemas.openxmlformats.org/drawingml/2006/main" xmlns:p="http://schemas.openxmlformats.org/presentationml/2006/main" xmlns:r="http://schemas.openxmlformats.org/officeDocument/2006/relationships">
+  <p:cSld>
+    <p:spTree>
+      <p:nvGrpSpPr>
+        <p:cNvPr id="1" name=""/>
+        <p:cNvGrpSpPr/>
+        <p:nvPr/>
+      </p:nvGrpSpPr>
+      <p:grpSpPr>
+        <a:xfrm>
+          <a:off x="0" y="0"/>
+          <a:ext cx="0" cy="0"/>
+          <a:chOff x="0" y="0"/>
+          <a:chExt cx="0" cy="0"/>
+        </a:xfrm>
+      </p:grpSpPr>
+      <p:sp>
+        <p:nvSpPr>
+          <p:cNvPr id="2" name="Slide Image Placeholder 1"/>
+          <p:cNvSpPr>
+            <a:spLocks noGrp="1"/>
+          </p:cNvSpPr>
+          <p:nvPr>
+            <p:ph type="sldImg" idx="2"/>
+          </p:nvPr>
+        </p:nvSpPr>
+        <p:spPr/>
+      </p:sp>
+      <p:sp>
+        <p:nvSpPr>
+          <p:cNvPr id="3" name="Notes Placeholder 2"/>
+          <p:cNvSpPr>
+            <a:spLocks noGrp="1"/>
+          </p:cNvSpPr>
+          <p:nvPr>
+            <p:ph type="body" idx="3" sz="quarter"/>
+          </p:nvPr>
+        </p:nvSpPr>
+        <p:spPr/>
+        <p:txBody>
+          <a:bodyPr/>
+          <a:lstStyle/>
+          <a:p>
+            <a:r>
+              <a:t>module6/examples/scoreboards/README.md</a:t>
+            </a:r>
+          </a:p>
+        </p:txBody>
+      </p:sp>
+      <p:sp>
+        <p:nvSpPr>
+          <p:cNvPr id="4" name="Slide Number Placeholder 3"/>
+          <p:cNvSpPr>
+            <a:spLocks noGrp="1"/>
+          </p:cNvSpPr>
+          <p:nvPr>
+            <p:ph type="sldNum" idx="5" sz="quarter"/>
+          </p:nvPr>
+        </p:nvSpPr>
+        <p:spPr/>
+      </p:sp>
+    </p:spTree>
+  </p:cSld>
+  <p:clrMapOvr>
+    <a:masterClrMapping/>
+  </p:clrMapOvr>
+</p:notes>
+</file>
+
 <file path=ppt/notesSlides/notesSlide7.xml><?xml version="1.0" encoding="utf-8"?>
 <p:notes xmlns:a="http://schemas.openxmlformats.org/drawingml/2006/main" xmlns:p="http://schemas.openxmlformats.org/presentationml/2006/main" xmlns:r="http://schemas.openxmlformats.org/officeDocument/2006/relationships">
   <p:cSld>
@@ -4564,6 +5206,216 @@
           <a:p>
             <a:r>
               <a:t>From MODULE6 Topics Covered.</a:t>
+            </a:r>
+          </a:p>
+        </p:txBody>
+      </p:sp>
+      <p:sp>
+        <p:nvSpPr>
+          <p:cNvPr id="4" name="Slide Number Placeholder 3"/>
+          <p:cNvSpPr>
+            <a:spLocks noGrp="1"/>
+          </p:cNvSpPr>
+          <p:nvPr>
+            <p:ph type="sldNum" idx="5" sz="quarter"/>
+          </p:nvPr>
+        </p:nvSpPr>
+        <p:spPr/>
+      </p:sp>
+    </p:spTree>
+  </p:cSld>
+  <p:clrMapOvr>
+    <a:masterClrMapping/>
+  </p:clrMapOvr>
+</p:notes>
+</file>
+
+<file path=ppt/notesSlides/notesSlide70.xml><?xml version="1.0" encoding="utf-8"?>
+<p:notes xmlns:a="http://schemas.openxmlformats.org/drawingml/2006/main" xmlns:p="http://schemas.openxmlformats.org/presentationml/2006/main" xmlns:r="http://schemas.openxmlformats.org/officeDocument/2006/relationships">
+  <p:cSld>
+    <p:spTree>
+      <p:nvGrpSpPr>
+        <p:cNvPr id="1" name=""/>
+        <p:cNvGrpSpPr/>
+        <p:nvPr/>
+      </p:nvGrpSpPr>
+      <p:grpSpPr>
+        <a:xfrm>
+          <a:off x="0" y="0"/>
+          <a:ext cx="0" cy="0"/>
+          <a:chOff x="0" y="0"/>
+          <a:chExt cx="0" cy="0"/>
+        </a:xfrm>
+      </p:grpSpPr>
+      <p:sp>
+        <p:nvSpPr>
+          <p:cNvPr id="2" name="Slide Image Placeholder 1"/>
+          <p:cNvSpPr>
+            <a:spLocks noGrp="1"/>
+          </p:cNvSpPr>
+          <p:nvPr>
+            <p:ph type="sldImg" idx="2"/>
+          </p:nvPr>
+        </p:nvSpPr>
+        <p:spPr/>
+      </p:sp>
+      <p:sp>
+        <p:nvSpPr>
+          <p:cNvPr id="3" name="Notes Placeholder 2"/>
+          <p:cNvSpPr>
+            <a:spLocks noGrp="1"/>
+          </p:cNvSpPr>
+          <p:nvPr>
+            <p:ph type="body" idx="3" sz="quarter"/>
+          </p:nvPr>
+        </p:nvSpPr>
+        <p:spPr/>
+        <p:txBody>
+          <a:bodyPr/>
+          <a:lstStyle/>
+          <a:p>
+            <a:r>
+              <a:t>Hands-on: module6/examples/scoreboards/</a:t>
+            </a:r>
+          </a:p>
+        </p:txBody>
+      </p:sp>
+      <p:sp>
+        <p:nvSpPr>
+          <p:cNvPr id="4" name="Slide Number Placeholder 3"/>
+          <p:cNvSpPr>
+            <a:spLocks noGrp="1"/>
+          </p:cNvSpPr>
+          <p:nvPr>
+            <p:ph type="sldNum" idx="5" sz="quarter"/>
+          </p:nvPr>
+        </p:nvSpPr>
+        <p:spPr/>
+      </p:sp>
+    </p:spTree>
+  </p:cSld>
+  <p:clrMapOvr>
+    <a:masterClrMapping/>
+  </p:clrMapOvr>
+</p:notes>
+</file>
+
+<file path=ppt/notesSlides/notesSlide71.xml><?xml version="1.0" encoding="utf-8"?>
+<p:notes xmlns:a="http://schemas.openxmlformats.org/drawingml/2006/main" xmlns:p="http://schemas.openxmlformats.org/presentationml/2006/main" xmlns:r="http://schemas.openxmlformats.org/officeDocument/2006/relationships">
+  <p:cSld>
+    <p:spTree>
+      <p:nvGrpSpPr>
+        <p:cNvPr id="1" name=""/>
+        <p:cNvGrpSpPr/>
+        <p:nvPr/>
+      </p:nvGrpSpPr>
+      <p:grpSpPr>
+        <a:xfrm>
+          <a:off x="0" y="0"/>
+          <a:ext cx="0" cy="0"/>
+          <a:chOff x="0" y="0"/>
+          <a:chExt cx="0" cy="0"/>
+        </a:xfrm>
+      </p:grpSpPr>
+      <p:sp>
+        <p:nvSpPr>
+          <p:cNvPr id="2" name="Slide Image Placeholder 1"/>
+          <p:cNvSpPr>
+            <a:spLocks noGrp="1"/>
+          </p:cNvSpPr>
+          <p:nvPr>
+            <p:ph type="sldImg" idx="2"/>
+          </p:nvPr>
+        </p:nvSpPr>
+        <p:spPr/>
+      </p:sp>
+      <p:sp>
+        <p:nvSpPr>
+          <p:cNvPr id="3" name="Notes Placeholder 2"/>
+          <p:cNvSpPr>
+            <a:spLocks noGrp="1"/>
+          </p:cNvSpPr>
+          <p:nvPr>
+            <p:ph type="body" idx="3" sz="quarter"/>
+          </p:nvPr>
+        </p:nvSpPr>
+        <p:spPr/>
+        <p:txBody>
+          <a:bodyPr/>
+          <a:lstStyle/>
+          <a:p>
+            <a:r>
+              <a:t>From MODULE6 Learning Outcomes.</a:t>
+            </a:r>
+          </a:p>
+        </p:txBody>
+      </p:sp>
+      <p:sp>
+        <p:nvSpPr>
+          <p:cNvPr id="4" name="Slide Number Placeholder 3"/>
+          <p:cNvSpPr>
+            <a:spLocks noGrp="1"/>
+          </p:cNvSpPr>
+          <p:nvPr>
+            <p:ph type="sldNum" idx="5" sz="quarter"/>
+          </p:nvPr>
+        </p:nvSpPr>
+        <p:spPr/>
+      </p:sp>
+    </p:spTree>
+  </p:cSld>
+  <p:clrMapOvr>
+    <a:masterClrMapping/>
+  </p:clrMapOvr>
+</p:notes>
+</file>
+
+<file path=ppt/notesSlides/notesSlide72.xml><?xml version="1.0" encoding="utf-8"?>
+<p:notes xmlns:a="http://schemas.openxmlformats.org/drawingml/2006/main" xmlns:p="http://schemas.openxmlformats.org/presentationml/2006/main" xmlns:r="http://schemas.openxmlformats.org/officeDocument/2006/relationships">
+  <p:cSld>
+    <p:spTree>
+      <p:nvGrpSpPr>
+        <p:cNvPr id="1" name=""/>
+        <p:cNvGrpSpPr/>
+        <p:nvPr/>
+      </p:nvGrpSpPr>
+      <p:grpSpPr>
+        <a:xfrm>
+          <a:off x="0" y="0"/>
+          <a:ext cx="0" cy="0"/>
+          <a:chOff x="0" y="0"/>
+          <a:chExt cx="0" cy="0"/>
+        </a:xfrm>
+      </p:grpSpPr>
+      <p:sp>
+        <p:nvSpPr>
+          <p:cNvPr id="2" name="Slide Image Placeholder 1"/>
+          <p:cNvSpPr>
+            <a:spLocks noGrp="1"/>
+          </p:cNvSpPr>
+          <p:nvPr>
+            <p:ph type="sldImg" idx="2"/>
+          </p:nvPr>
+        </p:nvSpPr>
+        <p:spPr/>
+      </p:sp>
+      <p:sp>
+        <p:nvSpPr>
+          <p:cNvPr id="3" name="Notes Placeholder 2"/>
+          <p:cNvSpPr>
+            <a:spLocks noGrp="1"/>
+          </p:cNvSpPr>
+          <p:nvPr>
+            <p:ph type="body" idx="3" sz="quarter"/>
+          </p:nvPr>
+        </p:nvSpPr>
+        <p:spPr/>
+        <p:txBody>
+          <a:bodyPr/>
+          <a:lstStyle/>
+          <a:p>
+            <a:r>
+              <a:t>From MODULE6 Learning Outcomes.</a:t>
             </a:r>
           </a:p>
         </p:txBody>
@@ -23979,7 +24831,7 @@
               </a:defRPr>
             </a:pPr>
             <a:r>
-              <a:t>$ ./scripts/module6.sh --check</a:t>
+              <a:t>$ ./scripts/module6.sh --architecture</a:t>
             </a:r>
           </a:p>
         </p:txBody>
@@ -24213,8 +25065,8 @@
         </p:nvSpPr>
         <p:spPr>
           <a:xfrm>
-            <a:off x="548640" y="2743200"/>
-            <a:ext cx="11064240" cy="1371600"/>
+            <a:off x="548640" y="411480"/>
+            <a:ext cx="11064240" cy="777240"/>
           </a:xfrm>
           <a:prstGeom prst="rect">
             <a:avLst/>
@@ -24227,11 +25079,11 @@
           </a:bodyPr>
           <a:lstStyle/>
           <a:p>
-            <a:pPr algn="ctr">
-              <a:lnSpc>
-                <a:spcPts val="2200"/>
-              </a:lnSpc>
-              <a:defRPr sz="3600" b="1">
+            <a:pPr>
+              <a:lnSpc>
+                <a:spcPts val="2200"/>
+              </a:lnSpc>
+              <a:defRPr sz="2800" b="1">
                 <a:solidFill>
                   <a:srgbClr val="1A1A2E"/>
                 </a:solidFill>
@@ -24239,7 +25091,7 @@
               </a:defRPr>
             </a:pPr>
             <a:r>
-              <a:t>Practice &amp; assessment</a:t>
+              <a:t>Example 1: Testbench Architecture</a:t>
             </a:r>
           </a:p>
         </p:txBody>
@@ -24247,6 +25099,143 @@
       <p:sp>
         <p:nvSpPr>
           <p:cNvPr id="3" name="TextBox 2"/>
+          <p:cNvSpPr txBox="1"/>
+          <p:nvPr/>
+        </p:nvSpPr>
+        <p:spPr>
+          <a:xfrm>
+            <a:off x="548640" y="1234440"/>
+            <a:ext cx="11064240" cy="4937760"/>
+          </a:xfrm>
+          <a:prstGeom prst="rect">
+            <a:avLst/>
+          </a:prstGeom>
+          <a:noFill/>
+        </p:spPr>
+        <p:txBody>
+          <a:bodyPr wrap="square">
+            <a:noAutofit/>
+          </a:bodyPr>
+          <a:lstStyle/>
+          <a:p>
+            <a:pPr>
+              <a:lnSpc>
+                <a:spcPts val="2200"/>
+              </a:lnSpc>
+              <a:spcAft>
+                <a:spcPts val="1000"/>
+              </a:spcAft>
+              <a:defRPr sz="2000" b="0">
+                <a:solidFill>
+                  <a:srgbClr val="333333"/>
+                </a:solidFill>
+                <a:latin typeface="Calibri"/>
+              </a:defRPr>
+            </a:pPr>
+            <a:r>
+              <a:t>• Transaction Class (`ArchTxn`): Base transaction with</a:t>
+            </a:r>
+          </a:p>
+          <a:p>
+            <a:pPr>
+              <a:lnSpc>
+                <a:spcPts val="2200"/>
+              </a:lnSpc>
+              <a:spcAft>
+                <a:spcPts val="1000"/>
+              </a:spcAft>
+              <a:defRPr sz="2000" b="0">
+                <a:solidFill>
+                  <a:srgbClr val="333333"/>
+                </a:solidFill>
+                <a:latin typeface="Calibri"/>
+              </a:defRPr>
+            </a:pPr>
+            <a:r>
+              <a:t>      address, data, and write/read control</a:t>
+            </a:r>
+          </a:p>
+          <a:p>
+            <a:pPr>
+              <a:lnSpc>
+                <a:spcPts val="2200"/>
+              </a:lnSpc>
+              <a:spcAft>
+                <a:spcPts val="1000"/>
+              </a:spcAft>
+              <a:defRPr sz="2000" b="0">
+                <a:solidFill>
+                  <a:srgbClr val="333333"/>
+                </a:solidFill>
+                <a:latin typeface="Calibri"/>
+              </a:defRPr>
+            </a:pPr>
+            <a:r>
+              <a:t>• Sequencer (`ArchSequencer`): UVM sequencer for</a:t>
+            </a:r>
+          </a:p>
+          <a:p>
+            <a:pPr>
+              <a:lnSpc>
+                <a:spcPts val="2200"/>
+              </a:lnSpc>
+              <a:spcAft>
+                <a:spcPts val="1000"/>
+              </a:spcAft>
+              <a:defRPr sz="2000" b="0">
+                <a:solidFill>
+                  <a:srgbClr val="333333"/>
+                </a:solidFill>
+                <a:latin typeface="Calibri"/>
+              </a:defRPr>
+            </a:pPr>
+            <a:r>
+              <a:t>      transaction flow control</a:t>
+            </a:r>
+          </a:p>
+          <a:p>
+            <a:pPr>
+              <a:lnSpc>
+                <a:spcPts val="2200"/>
+              </a:lnSpc>
+              <a:spcAft>
+                <a:spcPts val="1000"/>
+              </a:spcAft>
+              <a:defRPr sz="2000" b="0">
+                <a:solidFill>
+                  <a:srgbClr val="333333"/>
+                </a:solidFill>
+                <a:latin typeface="Calibri"/>
+              </a:defRPr>
+            </a:pPr>
+            <a:r>
+              <a:t>• Driver (`ArchDriver`): UVM driver that receives and</a:t>
+            </a:r>
+          </a:p>
+          <a:p>
+            <a:pPr>
+              <a:lnSpc>
+                <a:spcPts val="2200"/>
+              </a:lnSpc>
+              <a:spcAft>
+                <a:spcPts val="1000"/>
+              </a:spcAft>
+              <a:defRPr sz="2000" b="0">
+                <a:solidFill>
+                  <a:srgbClr val="333333"/>
+                </a:solidFill>
+                <a:latin typeface="Calibri"/>
+              </a:defRPr>
+            </a:pPr>
+            <a:r>
+              <a:t>      drives transactions</a:t>
+            </a:r>
+          </a:p>
+        </p:txBody>
+      </p:sp>
+      <p:sp>
+        <p:nvSpPr>
+          <p:cNvPr id="4" name="TextBox 3"/>
           <p:cNvSpPr txBox="1"/>
           <p:nvPr/>
         </p:nvSpPr>
@@ -24568,7 +25557,7 @@
               </a:defRPr>
             </a:pPr>
             <a:r>
-              <a:t>Exercises</a:t>
+              <a:t>Demo: Testbench Architecture</a:t>
             </a:r>
           </a:p>
         </p:txBody>
@@ -24581,13 +25570,15 @@
         </p:nvSpPr>
         <p:spPr>
           <a:xfrm>
-            <a:off x="548640" y="1234440"/>
-            <a:ext cx="11064240" cy="4937760"/>
+            <a:off x="548640" y="1051560"/>
+            <a:ext cx="11064240" cy="914400"/>
           </a:xfrm>
           <a:prstGeom prst="rect">
             <a:avLst/>
           </a:prstGeom>
-          <a:noFill/>
+          <a:solidFill>
+            <a:srgbClr val="F4F4F4"/>
+          </a:solidFill>
         </p:spPr>
         <p:txBody>
           <a:bodyPr wrap="square">
@@ -24600,100 +25591,48 @@
                 <a:spcPts val="2200"/>
               </a:lnSpc>
               <a:spcAft>
-                <a:spcPts val="1000"/>
-              </a:spcAft>
-              <a:defRPr sz="2000" b="0">
-                <a:solidFill>
-                  <a:srgbClr val="333333"/>
-                </a:solidFill>
-                <a:latin typeface="Calibri"/>
-              </a:defRPr>
-            </a:pPr>
-            <a:r>
-              <a:t>• Testbench Architecture</a:t>
-            </a:r>
-          </a:p>
-          <a:p>
-            <a:pPr>
-              <a:lnSpc>
-                <a:spcPts val="2200"/>
-              </a:lnSpc>
-              <a:spcAft>
-                <a:spcPts val="1000"/>
-              </a:spcAft>
-              <a:defRPr sz="2000" b="0">
-                <a:solidFill>
-                  <a:srgbClr val="333333"/>
-                </a:solidFill>
-                <a:latin typeface="Calibri"/>
-              </a:defRPr>
-            </a:pPr>
-            <a:r>
-              <a:t>• Multi-Agent Coordination</a:t>
-            </a:r>
-          </a:p>
-          <a:p>
-            <a:pPr>
-              <a:lnSpc>
-                <a:spcPts val="2200"/>
-              </a:lnSpc>
-              <a:spcAft>
-                <a:spcPts val="1000"/>
-              </a:spcAft>
-              <a:defRPr sz="2000" b="0">
-                <a:solidFill>
-                  <a:srgbClr val="333333"/>
-                </a:solidFill>
-                <a:latin typeface="Calibri"/>
-              </a:defRPr>
-            </a:pPr>
-            <a:r>
-              <a:t>• Protocol Verification</a:t>
-            </a:r>
-          </a:p>
-          <a:p>
-            <a:pPr>
-              <a:lnSpc>
-                <a:spcPts val="2200"/>
-              </a:lnSpc>
-              <a:spcAft>
-                <a:spcPts val="1000"/>
-              </a:spcAft>
-              <a:defRPr sz="2000" b="0">
-                <a:solidFill>
-                  <a:srgbClr val="333333"/>
-                </a:solidFill>
-                <a:latin typeface="Calibri"/>
-              </a:defRPr>
-            </a:pPr>
-            <a:r>
-              <a:t>• Protocol Checkers</a:t>
-            </a:r>
-          </a:p>
-          <a:p>
-            <a:pPr>
-              <a:lnSpc>
-                <a:spcPts val="2200"/>
-              </a:lnSpc>
-              <a:spcAft>
-                <a:spcPts val="1000"/>
-              </a:spcAft>
-              <a:defRPr sz="2000" b="0">
-                <a:solidFill>
-                  <a:srgbClr val="333333"/>
-                </a:solidFill>
-                <a:latin typeface="Calibri"/>
-              </a:defRPr>
-            </a:pPr>
-            <a:r>
-              <a:t>• Multi-Channel Scoreboards</a:t>
-            </a:r>
-          </a:p>
-        </p:txBody>
-      </p:sp>
-      <p:sp>
-        <p:nvSpPr>
-          <p:cNvPr id="4" name="TextBox 3"/>
+                <a:spcPts val="200"/>
+              </a:spcAft>
+              <a:defRPr sz="2000" b="0">
+                <a:solidFill>
+                  <a:srgbClr val="333333"/>
+                </a:solidFill>
+                <a:latin typeface="Consolas"/>
+              </a:defRPr>
+            </a:pPr>
+            <a:r>
+              <a:t>$ ./scripts/module6.sh --architecture</a:t>
+            </a:r>
+          </a:p>
+        </p:txBody>
+      </p:sp>
+      <p:pic>
+        <p:nvPicPr>
+          <p:cNvPr id="4" name="Picture 3" descr="ex01_architecture.png"/>
+          <p:cNvPicPr>
+            <a:picLocks noChangeAspect="1"/>
+          </p:cNvPicPr>
+          <p:nvPr/>
+        </p:nvPicPr>
+        <p:blipFill>
+          <a:blip r:embed="rId2"/>
+          <a:stretch>
+            <a:fillRect/>
+          </a:stretch>
+        </p:blipFill>
+        <p:spPr>
+          <a:xfrm>
+            <a:off x="548640" y="1965960"/>
+            <a:ext cx="7071358" cy="3977639"/>
+          </a:xfrm>
+          <a:prstGeom prst="rect">
+            <a:avLst/>
+          </a:prstGeom>
+        </p:spPr>
+      </p:pic>
+      <p:sp>
+        <p:nvSpPr>
+          <p:cNvPr id="5" name="TextBox 4"/>
           <p:cNvSpPr txBox="1"/>
           <p:nvPr/>
         </p:nvSpPr>
@@ -24782,7 +25721,7 @@
               </a:defRPr>
             </a:pPr>
             <a:r>
-              <a:t>Assessment checklist</a:t>
+              <a:t>Example 2: Multi-Agent Environment</a:t>
             </a:r>
           </a:p>
         </p:txBody>
@@ -24824,102 +25763,102 @@
               </a:defRPr>
             </a:pPr>
             <a:r>
-              <a:t>• Can design complex testbench architectures</a:t>
-            </a:r>
-          </a:p>
-          <a:p>
-            <a:pPr>
-              <a:lnSpc>
-                <a:spcPts val="2200"/>
-              </a:lnSpc>
-              <a:spcAft>
-                <a:spcPts val="1000"/>
-              </a:spcAft>
-              <a:defRPr sz="2000" b="0">
-                <a:solidFill>
-                  <a:srgbClr val="333333"/>
-                </a:solidFill>
-                <a:latin typeface="Calibri"/>
-              </a:defRPr>
-            </a:pPr>
-            <a:r>
-              <a:t>• Can coordinate multiple agents</a:t>
-            </a:r>
-          </a:p>
-          <a:p>
-            <a:pPr>
-              <a:lnSpc>
-                <a:spcPts val="2200"/>
-              </a:lnSpc>
-              <a:spcAft>
-                <a:spcPts val="1000"/>
-              </a:spcAft>
-              <a:defRPr sz="2000" b="0">
-                <a:solidFill>
-                  <a:srgbClr val="333333"/>
-                </a:solidFill>
-                <a:latin typeface="Calibri"/>
-              </a:defRPr>
-            </a:pPr>
-            <a:r>
-              <a:t>• Can verify protocols</a:t>
-            </a:r>
-          </a:p>
-          <a:p>
-            <a:pPr>
-              <a:lnSpc>
-                <a:spcPts val="2200"/>
-              </a:lnSpc>
-              <a:spcAft>
-                <a:spcPts val="1000"/>
-              </a:spcAft>
-              <a:defRPr sz="2000" b="0">
-                <a:solidFill>
-                  <a:srgbClr val="333333"/>
-                </a:solidFill>
-                <a:latin typeface="Calibri"/>
-              </a:defRPr>
-            </a:pPr>
-            <a:r>
-              <a:t>• Can implement protocol checkers</a:t>
-            </a:r>
-          </a:p>
-          <a:p>
-            <a:pPr>
-              <a:lnSpc>
-                <a:spcPts val="2200"/>
-              </a:lnSpc>
-              <a:spcAft>
-                <a:spcPts val="1000"/>
-              </a:spcAft>
-              <a:defRPr sz="2000" b="0">
-                <a:solidFill>
-                  <a:srgbClr val="333333"/>
-                </a:solidFill>
-                <a:latin typeface="Calibri"/>
-              </a:defRPr>
-            </a:pPr>
-            <a:r>
-              <a:t>• Can build multi-channel scoreboards</a:t>
-            </a:r>
-          </a:p>
-          <a:p>
-            <a:pPr>
-              <a:lnSpc>
-                <a:spcPts val="2200"/>
-              </a:lnSpc>
-              <a:spcAft>
-                <a:spcPts val="1000"/>
-              </a:spcAft>
-              <a:defRPr sz="2000" b="0">
-                <a:solidFill>
-                  <a:srgbClr val="333333"/>
-                </a:solidFill>
-                <a:latin typeface="Calibri"/>
-              </a:defRPr>
-            </a:pPr>
-            <a:r>
-              <a:t>• Can apply production-quality testbench patterns</a:t>
+              <a:t>• Transaction (`MA_Txn`): Transaction with agent ID</a:t>
+            </a:r>
+          </a:p>
+          <a:p>
+            <a:pPr>
+              <a:lnSpc>
+                <a:spcPts val="2200"/>
+              </a:lnSpc>
+              <a:spcAft>
+                <a:spcPts val="1000"/>
+              </a:spcAft>
+              <a:defRPr sz="2000" b="0">
+                <a:solidFill>
+                  <a:srgbClr val="333333"/>
+                </a:solidFill>
+                <a:latin typeface="Calibri"/>
+              </a:defRPr>
+            </a:pPr>
+            <a:r>
+              <a:t>      and data fields</a:t>
+            </a:r>
+          </a:p>
+          <a:p>
+            <a:pPr>
+              <a:lnSpc>
+                <a:spcPts val="2200"/>
+              </a:lnSpc>
+              <a:spcAft>
+                <a:spcPts val="1000"/>
+              </a:spcAft>
+              <a:defRPr sz="2000" b="0">
+                <a:solidFill>
+                  <a:srgbClr val="333333"/>
+                </a:solidFill>
+                <a:latin typeface="Calibri"/>
+              </a:defRPr>
+            </a:pPr>
+            <a:r>
+              <a:t>• Agent (`MA_Agent`): Parameterized agent with</a:t>
+            </a:r>
+          </a:p>
+          <a:p>
+            <a:pPr>
+              <a:lnSpc>
+                <a:spcPts val="2200"/>
+              </a:lnSpc>
+              <a:spcAft>
+                <a:spcPts val="1000"/>
+              </a:spcAft>
+              <a:defRPr sz="2000" b="0">
+                <a:solidFill>
+                  <a:srgbClr val="333333"/>
+                </a:solidFill>
+                <a:latin typeface="Calibri"/>
+              </a:defRPr>
+            </a:pPr>
+            <a:r>
+              <a:t>      configurable agent ID</a:t>
+            </a:r>
+          </a:p>
+          <a:p>
+            <a:pPr>
+              <a:lnSpc>
+                <a:spcPts val="2200"/>
+              </a:lnSpc>
+              <a:spcAft>
+                <a:spcPts val="1000"/>
+              </a:spcAft>
+              <a:defRPr sz="2000" b="0">
+                <a:solidFill>
+                  <a:srgbClr val="333333"/>
+                </a:solidFill>
+                <a:latin typeface="Calibri"/>
+              </a:defRPr>
+            </a:pPr>
+            <a:r>
+              <a:t>• Virtual Sequence (`MA_VirtualSeq`): Coordinates</a:t>
+            </a:r>
+          </a:p>
+          <a:p>
+            <a:pPr>
+              <a:lnSpc>
+                <a:spcPts val="2200"/>
+              </a:lnSpc>
+              <a:spcAft>
+                <a:spcPts val="1000"/>
+              </a:spcAft>
+              <a:defRPr sz="2000" b="0">
+                <a:solidFill>
+                  <a:srgbClr val="333333"/>
+                </a:solidFill>
+                <a:latin typeface="Calibri"/>
+              </a:defRPr>
+            </a:pPr>
+            <a:r>
+              <a:t>      sequences across multiple sequencers</a:t>
             </a:r>
           </a:p>
         </p:txBody>
@@ -25015,7 +25954,171 @@
               </a:defRPr>
             </a:pPr>
             <a:r>
-              <a:t>Summary &amp; next steps</a:t>
+              <a:t>Demo: Multi-Agent Environment</a:t>
+            </a:r>
+          </a:p>
+        </p:txBody>
+      </p:sp>
+      <p:sp>
+        <p:nvSpPr>
+          <p:cNvPr id="3" name="TextBox 2"/>
+          <p:cNvSpPr txBox="1"/>
+          <p:nvPr/>
+        </p:nvSpPr>
+        <p:spPr>
+          <a:xfrm>
+            <a:off x="548640" y="1051560"/>
+            <a:ext cx="11064240" cy="914400"/>
+          </a:xfrm>
+          <a:prstGeom prst="rect">
+            <a:avLst/>
+          </a:prstGeom>
+          <a:solidFill>
+            <a:srgbClr val="F4F4F4"/>
+          </a:solidFill>
+        </p:spPr>
+        <p:txBody>
+          <a:bodyPr wrap="square">
+            <a:noAutofit/>
+          </a:bodyPr>
+          <a:lstStyle/>
+          <a:p>
+            <a:pPr>
+              <a:lnSpc>
+                <a:spcPts val="2200"/>
+              </a:lnSpc>
+              <a:spcAft>
+                <a:spcPts val="200"/>
+              </a:spcAft>
+              <a:defRPr sz="2000" b="0">
+                <a:solidFill>
+                  <a:srgbClr val="333333"/>
+                </a:solidFill>
+                <a:latin typeface="Consolas"/>
+              </a:defRPr>
+            </a:pPr>
+            <a:r>
+              <a:t>$ ./scripts/module6.sh --multi-agent</a:t>
+            </a:r>
+          </a:p>
+        </p:txBody>
+      </p:sp>
+      <p:pic>
+        <p:nvPicPr>
+          <p:cNvPr id="4" name="Picture 3" descr="ex02_multi_agent.png"/>
+          <p:cNvPicPr>
+            <a:picLocks noChangeAspect="1"/>
+          </p:cNvPicPr>
+          <p:nvPr/>
+        </p:nvPicPr>
+        <p:blipFill>
+          <a:blip r:embed="rId2"/>
+          <a:stretch>
+            <a:fillRect/>
+          </a:stretch>
+        </p:blipFill>
+        <p:spPr>
+          <a:xfrm>
+            <a:off x="548640" y="1965960"/>
+            <a:ext cx="7071358" cy="3977639"/>
+          </a:xfrm>
+          <a:prstGeom prst="rect">
+            <a:avLst/>
+          </a:prstGeom>
+        </p:spPr>
+      </p:pic>
+      <p:sp>
+        <p:nvSpPr>
+          <p:cNvPr id="5" name="TextBox 4"/>
+          <p:cNvSpPr txBox="1"/>
+          <p:nvPr/>
+        </p:nvSpPr>
+        <p:spPr>
+          <a:xfrm>
+            <a:off x="548640" y="6355080"/>
+            <a:ext cx="11064240" cy="320040"/>
+          </a:xfrm>
+          <a:prstGeom prst="rect">
+            <a:avLst/>
+          </a:prstGeom>
+          <a:noFill/>
+        </p:spPr>
+        <p:txBody>
+          <a:bodyPr wrap="square">
+            <a:noAutofit/>
+          </a:bodyPr>
+          <a:lstStyle/>
+          <a:p>
+            <a:pPr algn="r">
+              <a:lnSpc>
+                <a:spcPts val="2200"/>
+              </a:lnSpc>
+              <a:defRPr sz="1000" b="0">
+                <a:solidFill>
+                  <a:srgbClr val="666666"/>
+                </a:solidFill>
+                <a:latin typeface="Calibri"/>
+              </a:defRPr>
+            </a:pPr>
+            <a:r>
+              <a:t>learn_uvm2017_sv_verilator / Module 6</a:t>
+            </a:r>
+          </a:p>
+        </p:txBody>
+      </p:sp>
+    </p:spTree>
+  </p:cSld>
+  <p:clrMapOvr>
+    <a:masterClrMapping/>
+  </p:clrMapOvr>
+</p:sld>
+</file>
+
+<file path=ppt/slides/slide73.xml><?xml version="1.0" encoding="utf-8"?>
+<p:sld xmlns:a="http://schemas.openxmlformats.org/drawingml/2006/main" xmlns:p="http://schemas.openxmlformats.org/presentationml/2006/main" xmlns:r="http://schemas.openxmlformats.org/officeDocument/2006/relationships">
+  <p:cSld>
+    <p:spTree>
+      <p:nvGrpSpPr>
+        <p:cNvPr id="1" name=""/>
+        <p:cNvGrpSpPr/>
+        <p:nvPr/>
+      </p:nvGrpSpPr>
+      <p:grpSpPr/>
+      <p:sp>
+        <p:nvSpPr>
+          <p:cNvPr id="2" name="TextBox 1"/>
+          <p:cNvSpPr txBox="1"/>
+          <p:nvPr/>
+        </p:nvSpPr>
+        <p:spPr>
+          <a:xfrm>
+            <a:off x="548640" y="411480"/>
+            <a:ext cx="11064240" cy="777240"/>
+          </a:xfrm>
+          <a:prstGeom prst="rect">
+            <a:avLst/>
+          </a:prstGeom>
+          <a:noFill/>
+        </p:spPr>
+        <p:txBody>
+          <a:bodyPr wrap="square">
+            <a:noAutofit/>
+          </a:bodyPr>
+          <a:lstStyle/>
+          <a:p>
+            <a:pPr>
+              <a:lnSpc>
+                <a:spcPts val="2200"/>
+              </a:lnSpc>
+              <a:defRPr sz="2800" b="1">
+                <a:solidFill>
+                  <a:srgbClr val="1A1A2E"/>
+                </a:solidFill>
+                <a:latin typeface="Calibri"/>
+              </a:defRPr>
+            </a:pPr>
+            <a:r>
+              <a:t>Example 3: Protocol Verification</a:t>
             </a:r>
           </a:p>
         </p:txBody>
@@ -25057,64 +26160,102 @@
               </a:defRPr>
             </a:pPr>
             <a:r>
-              <a:t>• Build production-quality multi-agent testbenches</a:t>
-            </a:r>
-          </a:p>
-          <a:p>
-            <a:pPr>
-              <a:lnSpc>
-                <a:spcPts val="2200"/>
-              </a:lnSpc>
-              <a:spcAft>
-                <a:spcPts val="1000"/>
-              </a:spcAft>
-              <a:defRPr sz="2000" b="0">
-                <a:solidFill>
-                  <a:srgbClr val="333333"/>
-                </a:solidFill>
-                <a:latin typeface="Calibri"/>
-              </a:defRPr>
-            </a:pPr>
-            <a:r>
-              <a:t>• Complete module6/CHECKLIST.md</a:t>
-            </a:r>
-          </a:p>
-          <a:p>
-            <a:pPr>
-              <a:lnSpc>
-                <a:spcPts val="2200"/>
-              </a:lnSpc>
-              <a:spcAft>
-                <a:spcPts val="1000"/>
-              </a:spcAft>
-              <a:defRPr sz="2000" b="0">
-                <a:solidFill>
-                  <a:srgbClr val="333333"/>
-                </a:solidFill>
-                <a:latin typeface="Calibri"/>
-              </a:defRPr>
-            </a:pPr>
-            <a:r>
-              <a:t>• Run ./scripts/module6.sh --check</a:t>
-            </a:r>
-          </a:p>
-          <a:p>
-            <a:pPr>
-              <a:lnSpc>
-                <a:spcPts val="2200"/>
-              </a:lnSpc>
-              <a:spcAft>
-                <a:spcPts val="1000"/>
-              </a:spcAft>
-              <a:defRPr sz="2000" b="0">
-                <a:solidFill>
-                  <a:srgbClr val="333333"/>
-                </a:solidFill>
-                <a:latin typeface="Calibri"/>
-              </a:defRPr>
-            </a:pPr>
-            <a:r>
-              <a:t>• Next: Next module in course</a:t>
+              <a:t>• Interface (`axi_lite_if`): AXI4-Lite interface with</a:t>
+            </a:r>
+          </a:p>
+          <a:p>
+            <a:pPr>
+              <a:lnSpc>
+                <a:spcPts val="2200"/>
+              </a:lnSpc>
+              <a:spcAft>
+                <a:spcPts val="1000"/>
+              </a:spcAft>
+              <a:defRPr sz="2000" b="0">
+                <a:solidFill>
+                  <a:srgbClr val="333333"/>
+                </a:solidFill>
+                <a:latin typeface="Calibri"/>
+              </a:defRPr>
+            </a:pPr>
+            <a:r>
+              <a:t>      all required signals</a:t>
+            </a:r>
+          </a:p>
+          <a:p>
+            <a:pPr>
+              <a:lnSpc>
+                <a:spcPts val="2200"/>
+              </a:lnSpc>
+              <a:spcAft>
+                <a:spcPts val="1000"/>
+              </a:spcAft>
+              <a:defRPr sz="2000" b="0">
+                <a:solidFill>
+                  <a:srgbClr val="333333"/>
+                </a:solidFill>
+                <a:latin typeface="Calibri"/>
+              </a:defRPr>
+            </a:pPr>
+            <a:r>
+              <a:t>• Transaction (`AxiTxn`): AXI transaction with</a:t>
+            </a:r>
+          </a:p>
+          <a:p>
+            <a:pPr>
+              <a:lnSpc>
+                <a:spcPts val="2200"/>
+              </a:lnSpc>
+              <a:spcAft>
+                <a:spcPts val="1000"/>
+              </a:spcAft>
+              <a:defRPr sz="2000" b="0">
+                <a:solidFill>
+                  <a:srgbClr val="333333"/>
+                </a:solidFill>
+                <a:latin typeface="Calibri"/>
+              </a:defRPr>
+            </a:pPr>
+            <a:r>
+              <a:t>      read/write, address, and data</a:t>
+            </a:r>
+          </a:p>
+          <a:p>
+            <a:pPr>
+              <a:lnSpc>
+                <a:spcPts val="2200"/>
+              </a:lnSpc>
+              <a:spcAft>
+                <a:spcPts val="1000"/>
+              </a:spcAft>
+              <a:defRPr sz="2000" b="0">
+                <a:solidFill>
+                  <a:srgbClr val="333333"/>
+                </a:solidFill>
+                <a:latin typeface="Calibri"/>
+              </a:defRPr>
+            </a:pPr>
+            <a:r>
+              <a:t>• Driver (`AxiDriver`): Protocol-aware driver</a:t>
+            </a:r>
+          </a:p>
+          <a:p>
+            <a:pPr>
+              <a:lnSpc>
+                <a:spcPts val="2200"/>
+              </a:lnSpc>
+              <a:spcAft>
+                <a:spcPts val="1000"/>
+              </a:spcAft>
+              <a:defRPr sz="2000" b="0">
+                <a:solidFill>
+                  <a:srgbClr val="333333"/>
+                </a:solidFill>
+                <a:latin typeface="Calibri"/>
+              </a:defRPr>
+            </a:pPr>
+            <a:r>
+              <a:t>      implementing AXI4-Lite handshake protocol</a:t>
             </a:r>
           </a:p>
         </p:txBody>
@@ -25122,6 +26263,1060 @@
       <p:sp>
         <p:nvSpPr>
           <p:cNvPr id="4" name="TextBox 3"/>
+          <p:cNvSpPr txBox="1"/>
+          <p:nvPr/>
+        </p:nvSpPr>
+        <p:spPr>
+          <a:xfrm>
+            <a:off x="548640" y="6355080"/>
+            <a:ext cx="11064240" cy="320040"/>
+          </a:xfrm>
+          <a:prstGeom prst="rect">
+            <a:avLst/>
+          </a:prstGeom>
+          <a:noFill/>
+        </p:spPr>
+        <p:txBody>
+          <a:bodyPr wrap="square">
+            <a:noAutofit/>
+          </a:bodyPr>
+          <a:lstStyle/>
+          <a:p>
+            <a:pPr algn="r">
+              <a:lnSpc>
+                <a:spcPts val="2200"/>
+              </a:lnSpc>
+              <a:defRPr sz="1000" b="0">
+                <a:solidFill>
+                  <a:srgbClr val="666666"/>
+                </a:solidFill>
+                <a:latin typeface="Calibri"/>
+              </a:defRPr>
+            </a:pPr>
+            <a:r>
+              <a:t>learn_uvm2017_sv_verilator / Module 6</a:t>
+            </a:r>
+          </a:p>
+        </p:txBody>
+      </p:sp>
+    </p:spTree>
+  </p:cSld>
+  <p:clrMapOvr>
+    <a:masterClrMapping/>
+  </p:clrMapOvr>
+</p:sld>
+</file>
+
+<file path=ppt/slides/slide74.xml><?xml version="1.0" encoding="utf-8"?>
+<p:sld xmlns:a="http://schemas.openxmlformats.org/drawingml/2006/main" xmlns:p="http://schemas.openxmlformats.org/presentationml/2006/main" xmlns:r="http://schemas.openxmlformats.org/officeDocument/2006/relationships">
+  <p:cSld>
+    <p:spTree>
+      <p:nvGrpSpPr>
+        <p:cNvPr id="1" name=""/>
+        <p:cNvGrpSpPr/>
+        <p:nvPr/>
+      </p:nvGrpSpPr>
+      <p:grpSpPr/>
+      <p:sp>
+        <p:nvSpPr>
+          <p:cNvPr id="2" name="TextBox 1"/>
+          <p:cNvSpPr txBox="1"/>
+          <p:nvPr/>
+        </p:nvSpPr>
+        <p:spPr>
+          <a:xfrm>
+            <a:off x="548640" y="411480"/>
+            <a:ext cx="11064240" cy="777240"/>
+          </a:xfrm>
+          <a:prstGeom prst="rect">
+            <a:avLst/>
+          </a:prstGeom>
+          <a:noFill/>
+        </p:spPr>
+        <p:txBody>
+          <a:bodyPr wrap="square">
+            <a:noAutofit/>
+          </a:bodyPr>
+          <a:lstStyle/>
+          <a:p>
+            <a:pPr>
+              <a:lnSpc>
+                <a:spcPts val="2200"/>
+              </a:lnSpc>
+              <a:defRPr sz="2800" b="1">
+                <a:solidFill>
+                  <a:srgbClr val="1A1A2E"/>
+                </a:solidFill>
+                <a:latin typeface="Calibri"/>
+              </a:defRPr>
+            </a:pPr>
+            <a:r>
+              <a:t>Demo: Protocol Verification</a:t>
+            </a:r>
+          </a:p>
+        </p:txBody>
+      </p:sp>
+      <p:sp>
+        <p:nvSpPr>
+          <p:cNvPr id="3" name="TextBox 2"/>
+          <p:cNvSpPr txBox="1"/>
+          <p:nvPr/>
+        </p:nvSpPr>
+        <p:spPr>
+          <a:xfrm>
+            <a:off x="548640" y="1051560"/>
+            <a:ext cx="11064240" cy="914400"/>
+          </a:xfrm>
+          <a:prstGeom prst="rect">
+            <a:avLst/>
+          </a:prstGeom>
+          <a:solidFill>
+            <a:srgbClr val="F4F4F4"/>
+          </a:solidFill>
+        </p:spPr>
+        <p:txBody>
+          <a:bodyPr wrap="square">
+            <a:noAutofit/>
+          </a:bodyPr>
+          <a:lstStyle/>
+          <a:p>
+            <a:pPr>
+              <a:lnSpc>
+                <a:spcPts val="2200"/>
+              </a:lnSpc>
+              <a:spcAft>
+                <a:spcPts val="200"/>
+              </a:spcAft>
+              <a:defRPr sz="2000" b="0">
+                <a:solidFill>
+                  <a:srgbClr val="333333"/>
+                </a:solidFill>
+                <a:latin typeface="Consolas"/>
+              </a:defRPr>
+            </a:pPr>
+            <a:r>
+              <a:t>$ ./scripts/module6.sh --protocol</a:t>
+            </a:r>
+          </a:p>
+        </p:txBody>
+      </p:sp>
+      <p:pic>
+        <p:nvPicPr>
+          <p:cNvPr id="4" name="Picture 3" descr="ex03_protocol.png"/>
+          <p:cNvPicPr>
+            <a:picLocks noChangeAspect="1"/>
+          </p:cNvPicPr>
+          <p:nvPr/>
+        </p:nvPicPr>
+        <p:blipFill>
+          <a:blip r:embed="rId2"/>
+          <a:stretch>
+            <a:fillRect/>
+          </a:stretch>
+        </p:blipFill>
+        <p:spPr>
+          <a:xfrm>
+            <a:off x="548640" y="1965960"/>
+            <a:ext cx="7071358" cy="3977639"/>
+          </a:xfrm>
+          <a:prstGeom prst="rect">
+            <a:avLst/>
+          </a:prstGeom>
+        </p:spPr>
+      </p:pic>
+      <p:sp>
+        <p:nvSpPr>
+          <p:cNvPr id="5" name="TextBox 4"/>
+          <p:cNvSpPr txBox="1"/>
+          <p:nvPr/>
+        </p:nvSpPr>
+        <p:spPr>
+          <a:xfrm>
+            <a:off x="548640" y="6355080"/>
+            <a:ext cx="11064240" cy="320040"/>
+          </a:xfrm>
+          <a:prstGeom prst="rect">
+            <a:avLst/>
+          </a:prstGeom>
+          <a:noFill/>
+        </p:spPr>
+        <p:txBody>
+          <a:bodyPr wrap="square">
+            <a:noAutofit/>
+          </a:bodyPr>
+          <a:lstStyle/>
+          <a:p>
+            <a:pPr algn="r">
+              <a:lnSpc>
+                <a:spcPts val="2200"/>
+              </a:lnSpc>
+              <a:defRPr sz="1000" b="0">
+                <a:solidFill>
+                  <a:srgbClr val="666666"/>
+                </a:solidFill>
+                <a:latin typeface="Calibri"/>
+              </a:defRPr>
+            </a:pPr>
+            <a:r>
+              <a:t>learn_uvm2017_sv_verilator / Module 6</a:t>
+            </a:r>
+          </a:p>
+        </p:txBody>
+      </p:sp>
+    </p:spTree>
+  </p:cSld>
+  <p:clrMapOvr>
+    <a:masterClrMapping/>
+  </p:clrMapOvr>
+</p:sld>
+</file>
+
+<file path=ppt/slides/slide75.xml><?xml version="1.0" encoding="utf-8"?>
+<p:sld xmlns:a="http://schemas.openxmlformats.org/drawingml/2006/main" xmlns:p="http://schemas.openxmlformats.org/presentationml/2006/main" xmlns:r="http://schemas.openxmlformats.org/officeDocument/2006/relationships">
+  <p:cSld>
+    <p:spTree>
+      <p:nvGrpSpPr>
+        <p:cNvPr id="1" name=""/>
+        <p:cNvGrpSpPr/>
+        <p:nvPr/>
+      </p:nvGrpSpPr>
+      <p:grpSpPr/>
+      <p:sp>
+        <p:nvSpPr>
+          <p:cNvPr id="2" name="TextBox 1"/>
+          <p:cNvSpPr txBox="1"/>
+          <p:nvPr/>
+        </p:nvSpPr>
+        <p:spPr>
+          <a:xfrm>
+            <a:off x="548640" y="411480"/>
+            <a:ext cx="11064240" cy="777240"/>
+          </a:xfrm>
+          <a:prstGeom prst="rect">
+            <a:avLst/>
+          </a:prstGeom>
+          <a:noFill/>
+        </p:spPr>
+        <p:txBody>
+          <a:bodyPr wrap="square">
+            <a:noAutofit/>
+          </a:bodyPr>
+          <a:lstStyle/>
+          <a:p>
+            <a:pPr>
+              <a:lnSpc>
+                <a:spcPts val="2200"/>
+              </a:lnSpc>
+              <a:defRPr sz="2800" b="1">
+                <a:solidFill>
+                  <a:srgbClr val="1A1A2E"/>
+                </a:solidFill>
+                <a:latin typeface="Calibri"/>
+              </a:defRPr>
+            </a:pPr>
+            <a:r>
+              <a:t>Example 4: Protocol Checkers</a:t>
+            </a:r>
+          </a:p>
+        </p:txBody>
+      </p:sp>
+      <p:sp>
+        <p:nvSpPr>
+          <p:cNvPr id="3" name="TextBox 2"/>
+          <p:cNvSpPr txBox="1"/>
+          <p:nvPr/>
+        </p:nvSpPr>
+        <p:spPr>
+          <a:xfrm>
+            <a:off x="548640" y="1234440"/>
+            <a:ext cx="11064240" cy="4937760"/>
+          </a:xfrm>
+          <a:prstGeom prst="rect">
+            <a:avLst/>
+          </a:prstGeom>
+          <a:noFill/>
+        </p:spPr>
+        <p:txBody>
+          <a:bodyPr wrap="square">
+            <a:noAutofit/>
+          </a:bodyPr>
+          <a:lstStyle/>
+          <a:p>
+            <a:pPr>
+              <a:lnSpc>
+                <a:spcPts val="2200"/>
+              </a:lnSpc>
+              <a:spcAft>
+                <a:spcPts val="1000"/>
+              </a:spcAft>
+              <a:defRPr sz="2000" b="0">
+                <a:solidFill>
+                  <a:srgbClr val="333333"/>
+                </a:solidFill>
+                <a:latin typeface="Calibri"/>
+              </a:defRPr>
+            </a:pPr>
+            <a:r>
+              <a:t>• Interface (`chk_if`): Simple handshake interface</a:t>
+            </a:r>
+          </a:p>
+          <a:p>
+            <a:pPr>
+              <a:lnSpc>
+                <a:spcPts val="2200"/>
+              </a:lnSpc>
+              <a:spcAft>
+                <a:spcPts val="1000"/>
+              </a:spcAft>
+              <a:defRPr sz="2000" b="0">
+                <a:solidFill>
+                  <a:srgbClr val="333333"/>
+                </a:solidFill>
+                <a:latin typeface="Calibri"/>
+              </a:defRPr>
+            </a:pPr>
+            <a:r>
+              <a:t>      with valid/ready signals</a:t>
+            </a:r>
+          </a:p>
+          <a:p>
+            <a:pPr>
+              <a:lnSpc>
+                <a:spcPts val="2200"/>
+              </a:lnSpc>
+              <a:spcAft>
+                <a:spcPts val="1000"/>
+              </a:spcAft>
+              <a:defRPr sz="2000" b="0">
+                <a:solidFill>
+                  <a:srgbClr val="333333"/>
+                </a:solidFill>
+                <a:latin typeface="Calibri"/>
+              </a:defRPr>
+            </a:pPr>
+            <a:r>
+              <a:t>• Checker Component (`CheckerComp`): UVM component</a:t>
+            </a:r>
+          </a:p>
+          <a:p>
+            <a:pPr>
+              <a:lnSpc>
+                <a:spcPts val="2200"/>
+              </a:lnSpc>
+              <a:spcAft>
+                <a:spcPts val="1000"/>
+              </a:spcAft>
+              <a:defRPr sz="2000" b="0">
+                <a:solidFill>
+                  <a:srgbClr val="333333"/>
+                </a:solidFill>
+                <a:latin typeface="Calibri"/>
+              </a:defRPr>
+            </a:pPr>
+            <a:r>
+              <a:t>      that monitors protocol rules</a:t>
+            </a:r>
+          </a:p>
+          <a:p>
+            <a:pPr>
+              <a:lnSpc>
+                <a:spcPts val="2200"/>
+              </a:lnSpc>
+              <a:spcAft>
+                <a:spcPts val="1000"/>
+              </a:spcAft>
+              <a:defRPr sz="2000" b="0">
+                <a:solidFill>
+                  <a:srgbClr val="333333"/>
+                </a:solidFill>
+                <a:latin typeface="Calibri"/>
+              </a:defRPr>
+            </a:pPr>
+            <a:r>
+              <a:t>• Protocol Rules: Valid must stay asserted until ready</a:t>
+            </a:r>
+          </a:p>
+          <a:p>
+            <a:pPr>
+              <a:lnSpc>
+                <a:spcPts val="2200"/>
+              </a:lnSpc>
+              <a:spcAft>
+                <a:spcPts val="1000"/>
+              </a:spcAft>
+              <a:defRPr sz="2000" b="0">
+                <a:solidFill>
+                  <a:srgbClr val="333333"/>
+                </a:solidFill>
+                <a:latin typeface="Calibri"/>
+              </a:defRPr>
+            </a:pPr>
+            <a:r>
+              <a:t>      (bounded wait)</a:t>
+            </a:r>
+          </a:p>
+        </p:txBody>
+      </p:sp>
+      <p:sp>
+        <p:nvSpPr>
+          <p:cNvPr id="4" name="TextBox 3"/>
+          <p:cNvSpPr txBox="1"/>
+          <p:nvPr/>
+        </p:nvSpPr>
+        <p:spPr>
+          <a:xfrm>
+            <a:off x="548640" y="6355080"/>
+            <a:ext cx="11064240" cy="320040"/>
+          </a:xfrm>
+          <a:prstGeom prst="rect">
+            <a:avLst/>
+          </a:prstGeom>
+          <a:noFill/>
+        </p:spPr>
+        <p:txBody>
+          <a:bodyPr wrap="square">
+            <a:noAutofit/>
+          </a:bodyPr>
+          <a:lstStyle/>
+          <a:p>
+            <a:pPr algn="r">
+              <a:lnSpc>
+                <a:spcPts val="2200"/>
+              </a:lnSpc>
+              <a:defRPr sz="1000" b="0">
+                <a:solidFill>
+                  <a:srgbClr val="666666"/>
+                </a:solidFill>
+                <a:latin typeface="Calibri"/>
+              </a:defRPr>
+            </a:pPr>
+            <a:r>
+              <a:t>learn_uvm2017_sv_verilator / Module 6</a:t>
+            </a:r>
+          </a:p>
+        </p:txBody>
+      </p:sp>
+    </p:spTree>
+  </p:cSld>
+  <p:clrMapOvr>
+    <a:masterClrMapping/>
+  </p:clrMapOvr>
+</p:sld>
+</file>
+
+<file path=ppt/slides/slide76.xml><?xml version="1.0" encoding="utf-8"?>
+<p:sld xmlns:a="http://schemas.openxmlformats.org/drawingml/2006/main" xmlns:p="http://schemas.openxmlformats.org/presentationml/2006/main" xmlns:r="http://schemas.openxmlformats.org/officeDocument/2006/relationships">
+  <p:cSld>
+    <p:spTree>
+      <p:nvGrpSpPr>
+        <p:cNvPr id="1" name=""/>
+        <p:cNvGrpSpPr/>
+        <p:nvPr/>
+      </p:nvGrpSpPr>
+      <p:grpSpPr/>
+      <p:sp>
+        <p:nvSpPr>
+          <p:cNvPr id="2" name="TextBox 1"/>
+          <p:cNvSpPr txBox="1"/>
+          <p:nvPr/>
+        </p:nvSpPr>
+        <p:spPr>
+          <a:xfrm>
+            <a:off x="548640" y="411480"/>
+            <a:ext cx="11064240" cy="777240"/>
+          </a:xfrm>
+          <a:prstGeom prst="rect">
+            <a:avLst/>
+          </a:prstGeom>
+          <a:noFill/>
+        </p:spPr>
+        <p:txBody>
+          <a:bodyPr wrap="square">
+            <a:noAutofit/>
+          </a:bodyPr>
+          <a:lstStyle/>
+          <a:p>
+            <a:pPr>
+              <a:lnSpc>
+                <a:spcPts val="2200"/>
+              </a:lnSpc>
+              <a:defRPr sz="2800" b="1">
+                <a:solidFill>
+                  <a:srgbClr val="1A1A2E"/>
+                </a:solidFill>
+                <a:latin typeface="Calibri"/>
+              </a:defRPr>
+            </a:pPr>
+            <a:r>
+              <a:t>Demo: Protocol Checkers</a:t>
+            </a:r>
+          </a:p>
+        </p:txBody>
+      </p:sp>
+      <p:sp>
+        <p:nvSpPr>
+          <p:cNvPr id="3" name="TextBox 2"/>
+          <p:cNvSpPr txBox="1"/>
+          <p:nvPr/>
+        </p:nvSpPr>
+        <p:spPr>
+          <a:xfrm>
+            <a:off x="548640" y="1051560"/>
+            <a:ext cx="11064240" cy="914400"/>
+          </a:xfrm>
+          <a:prstGeom prst="rect">
+            <a:avLst/>
+          </a:prstGeom>
+          <a:solidFill>
+            <a:srgbClr val="F4F4F4"/>
+          </a:solidFill>
+        </p:spPr>
+        <p:txBody>
+          <a:bodyPr wrap="square">
+            <a:noAutofit/>
+          </a:bodyPr>
+          <a:lstStyle/>
+          <a:p>
+            <a:pPr>
+              <a:lnSpc>
+                <a:spcPts val="2200"/>
+              </a:lnSpc>
+              <a:spcAft>
+                <a:spcPts val="200"/>
+              </a:spcAft>
+              <a:defRPr sz="2000" b="0">
+                <a:solidFill>
+                  <a:srgbClr val="333333"/>
+                </a:solidFill>
+                <a:latin typeface="Consolas"/>
+              </a:defRPr>
+            </a:pPr>
+            <a:r>
+              <a:t>$ ./scripts/module6.sh --protocol-checkers</a:t>
+            </a:r>
+          </a:p>
+        </p:txBody>
+      </p:sp>
+      <p:pic>
+        <p:nvPicPr>
+          <p:cNvPr id="4" name="Picture 3" descr="ex04_protocol_checkers.png"/>
+          <p:cNvPicPr>
+            <a:picLocks noChangeAspect="1"/>
+          </p:cNvPicPr>
+          <p:nvPr/>
+        </p:nvPicPr>
+        <p:blipFill>
+          <a:blip r:embed="rId2"/>
+          <a:stretch>
+            <a:fillRect/>
+          </a:stretch>
+        </p:blipFill>
+        <p:spPr>
+          <a:xfrm>
+            <a:off x="548640" y="1965960"/>
+            <a:ext cx="7071358" cy="3977639"/>
+          </a:xfrm>
+          <a:prstGeom prst="rect">
+            <a:avLst/>
+          </a:prstGeom>
+        </p:spPr>
+      </p:pic>
+      <p:sp>
+        <p:nvSpPr>
+          <p:cNvPr id="5" name="TextBox 4"/>
+          <p:cNvSpPr txBox="1"/>
+          <p:nvPr/>
+        </p:nvSpPr>
+        <p:spPr>
+          <a:xfrm>
+            <a:off x="548640" y="6355080"/>
+            <a:ext cx="11064240" cy="320040"/>
+          </a:xfrm>
+          <a:prstGeom prst="rect">
+            <a:avLst/>
+          </a:prstGeom>
+          <a:noFill/>
+        </p:spPr>
+        <p:txBody>
+          <a:bodyPr wrap="square">
+            <a:noAutofit/>
+          </a:bodyPr>
+          <a:lstStyle/>
+          <a:p>
+            <a:pPr algn="r">
+              <a:lnSpc>
+                <a:spcPts val="2200"/>
+              </a:lnSpc>
+              <a:defRPr sz="1000" b="0">
+                <a:solidFill>
+                  <a:srgbClr val="666666"/>
+                </a:solidFill>
+                <a:latin typeface="Calibri"/>
+              </a:defRPr>
+            </a:pPr>
+            <a:r>
+              <a:t>learn_uvm2017_sv_verilator / Module 6</a:t>
+            </a:r>
+          </a:p>
+        </p:txBody>
+      </p:sp>
+    </p:spTree>
+  </p:cSld>
+  <p:clrMapOvr>
+    <a:masterClrMapping/>
+  </p:clrMapOvr>
+</p:sld>
+</file>
+
+<file path=ppt/slides/slide77.xml><?xml version="1.0" encoding="utf-8"?>
+<p:sld xmlns:a="http://schemas.openxmlformats.org/drawingml/2006/main" xmlns:p="http://schemas.openxmlformats.org/presentationml/2006/main" xmlns:r="http://schemas.openxmlformats.org/officeDocument/2006/relationships">
+  <p:cSld>
+    <p:spTree>
+      <p:nvGrpSpPr>
+        <p:cNvPr id="1" name=""/>
+        <p:cNvGrpSpPr/>
+        <p:nvPr/>
+      </p:nvGrpSpPr>
+      <p:grpSpPr/>
+      <p:sp>
+        <p:nvSpPr>
+          <p:cNvPr id="2" name="TextBox 1"/>
+          <p:cNvSpPr txBox="1"/>
+          <p:nvPr/>
+        </p:nvSpPr>
+        <p:spPr>
+          <a:xfrm>
+            <a:off x="548640" y="411480"/>
+            <a:ext cx="11064240" cy="777240"/>
+          </a:xfrm>
+          <a:prstGeom prst="rect">
+            <a:avLst/>
+          </a:prstGeom>
+          <a:noFill/>
+        </p:spPr>
+        <p:txBody>
+          <a:bodyPr wrap="square">
+            <a:noAutofit/>
+          </a:bodyPr>
+          <a:lstStyle/>
+          <a:p>
+            <a:pPr>
+              <a:lnSpc>
+                <a:spcPts val="2200"/>
+              </a:lnSpc>
+              <a:defRPr sz="2800" b="1">
+                <a:solidFill>
+                  <a:srgbClr val="1A1A2E"/>
+                </a:solidFill>
+                <a:latin typeface="Calibri"/>
+              </a:defRPr>
+            </a:pPr>
+            <a:r>
+              <a:t>Example 5: Multi-Channel Scoreboards</a:t>
+            </a:r>
+          </a:p>
+        </p:txBody>
+      </p:sp>
+      <p:sp>
+        <p:nvSpPr>
+          <p:cNvPr id="3" name="TextBox 2"/>
+          <p:cNvSpPr txBox="1"/>
+          <p:nvPr/>
+        </p:nvSpPr>
+        <p:spPr>
+          <a:xfrm>
+            <a:off x="548640" y="1234440"/>
+            <a:ext cx="11064240" cy="4937760"/>
+          </a:xfrm>
+          <a:prstGeom prst="rect">
+            <a:avLst/>
+          </a:prstGeom>
+          <a:noFill/>
+        </p:spPr>
+        <p:txBody>
+          <a:bodyPr wrap="square">
+            <a:noAutofit/>
+          </a:bodyPr>
+          <a:lstStyle/>
+          <a:p>
+            <a:pPr>
+              <a:lnSpc>
+                <a:spcPts val="2200"/>
+              </a:lnSpc>
+              <a:spcAft>
+                <a:spcPts val="1000"/>
+              </a:spcAft>
+              <a:defRPr sz="2000" b="0">
+                <a:solidFill>
+                  <a:srgbClr val="333333"/>
+                </a:solidFill>
+                <a:latin typeface="Calibri"/>
+              </a:defRPr>
+            </a:pPr>
+            <a:r>
+              <a:t>• Transaction (`SB_Txn`): Scoreboard transaction with</a:t>
+            </a:r>
+          </a:p>
+          <a:p>
+            <a:pPr>
+              <a:lnSpc>
+                <a:spcPts val="2200"/>
+              </a:lnSpc>
+              <a:spcAft>
+                <a:spcPts val="1000"/>
+              </a:spcAft>
+              <a:defRPr sz="2000" b="0">
+                <a:solidFill>
+                  <a:srgbClr val="333333"/>
+                </a:solidFill>
+                <a:latin typeface="Calibri"/>
+              </a:defRPr>
+            </a:pPr>
+            <a:r>
+              <a:t>      stream ID, sequence number, and data</a:t>
+            </a:r>
+          </a:p>
+          <a:p>
+            <a:pPr>
+              <a:lnSpc>
+                <a:spcPts val="2200"/>
+              </a:lnSpc>
+              <a:spcAft>
+                <a:spcPts val="1000"/>
+              </a:spcAft>
+              <a:defRPr sz="2000" b="0">
+                <a:solidFill>
+                  <a:srgbClr val="333333"/>
+                </a:solidFill>
+                <a:latin typeface="Calibri"/>
+              </a:defRPr>
+            </a:pPr>
+            <a:r>
+              <a:t>• Stream Producer (`StreamProducer`): Component that</a:t>
+            </a:r>
+          </a:p>
+          <a:p>
+            <a:pPr>
+              <a:lnSpc>
+                <a:spcPts val="2200"/>
+              </a:lnSpc>
+              <a:spcAft>
+                <a:spcPts val="1000"/>
+              </a:spcAft>
+              <a:defRPr sz="2000" b="0">
+                <a:solidFill>
+                  <a:srgbClr val="333333"/>
+                </a:solidFill>
+                <a:latin typeface="Calibri"/>
+              </a:defRPr>
+            </a:pPr>
+            <a:r>
+              <a:t>      generates transactions for a stream</a:t>
+            </a:r>
+          </a:p>
+          <a:p>
+            <a:pPr>
+              <a:lnSpc>
+                <a:spcPts val="2200"/>
+              </a:lnSpc>
+              <a:spcAft>
+                <a:spcPts val="1000"/>
+              </a:spcAft>
+              <a:defRPr sz="2000" b="0">
+                <a:solidFill>
+                  <a:srgbClr val="333333"/>
+                </a:solidFill>
+                <a:latin typeface="Calibri"/>
+              </a:defRPr>
+            </a:pPr>
+            <a:r>
+              <a:t>• Multi-Channel Scoreboard (`MultiChannelScoreboard`):</a:t>
+            </a:r>
+          </a:p>
+          <a:p>
+            <a:pPr>
+              <a:lnSpc>
+                <a:spcPts val="2200"/>
+              </a:lnSpc>
+              <a:spcAft>
+                <a:spcPts val="1000"/>
+              </a:spcAft>
+              <a:defRPr sz="2000" b="0">
+                <a:solidFill>
+                  <a:srgbClr val="333333"/>
+                </a:solidFill>
+                <a:latin typeface="Calibri"/>
+              </a:defRPr>
+            </a:pPr>
+            <a:r>
+              <a:t>      Scoreboard that matches transactions from mult…</a:t>
+            </a:r>
+          </a:p>
+        </p:txBody>
+      </p:sp>
+      <p:sp>
+        <p:nvSpPr>
+          <p:cNvPr id="4" name="TextBox 3"/>
+          <p:cNvSpPr txBox="1"/>
+          <p:nvPr/>
+        </p:nvSpPr>
+        <p:spPr>
+          <a:xfrm>
+            <a:off x="548640" y="6355080"/>
+            <a:ext cx="11064240" cy="320040"/>
+          </a:xfrm>
+          <a:prstGeom prst="rect">
+            <a:avLst/>
+          </a:prstGeom>
+          <a:noFill/>
+        </p:spPr>
+        <p:txBody>
+          <a:bodyPr wrap="square">
+            <a:noAutofit/>
+          </a:bodyPr>
+          <a:lstStyle/>
+          <a:p>
+            <a:pPr algn="r">
+              <a:lnSpc>
+                <a:spcPts val="2200"/>
+              </a:lnSpc>
+              <a:defRPr sz="1000" b="0">
+                <a:solidFill>
+                  <a:srgbClr val="666666"/>
+                </a:solidFill>
+                <a:latin typeface="Calibri"/>
+              </a:defRPr>
+            </a:pPr>
+            <a:r>
+              <a:t>learn_uvm2017_sv_verilator / Module 6</a:t>
+            </a:r>
+          </a:p>
+        </p:txBody>
+      </p:sp>
+    </p:spTree>
+  </p:cSld>
+  <p:clrMapOvr>
+    <a:masterClrMapping/>
+  </p:clrMapOvr>
+</p:sld>
+</file>
+
+<file path=ppt/slides/slide78.xml><?xml version="1.0" encoding="utf-8"?>
+<p:sld xmlns:a="http://schemas.openxmlformats.org/drawingml/2006/main" xmlns:p="http://schemas.openxmlformats.org/presentationml/2006/main" xmlns:r="http://schemas.openxmlformats.org/officeDocument/2006/relationships">
+  <p:cSld>
+    <p:spTree>
+      <p:nvGrpSpPr>
+        <p:cNvPr id="1" name=""/>
+        <p:cNvGrpSpPr/>
+        <p:nvPr/>
+      </p:nvGrpSpPr>
+      <p:grpSpPr/>
+      <p:sp>
+        <p:nvSpPr>
+          <p:cNvPr id="2" name="TextBox 1"/>
+          <p:cNvSpPr txBox="1"/>
+          <p:nvPr/>
+        </p:nvSpPr>
+        <p:spPr>
+          <a:xfrm>
+            <a:off x="548640" y="411480"/>
+            <a:ext cx="11064240" cy="777240"/>
+          </a:xfrm>
+          <a:prstGeom prst="rect">
+            <a:avLst/>
+          </a:prstGeom>
+          <a:noFill/>
+        </p:spPr>
+        <p:txBody>
+          <a:bodyPr wrap="square">
+            <a:noAutofit/>
+          </a:bodyPr>
+          <a:lstStyle/>
+          <a:p>
+            <a:pPr>
+              <a:lnSpc>
+                <a:spcPts val="2200"/>
+              </a:lnSpc>
+              <a:defRPr sz="2800" b="1">
+                <a:solidFill>
+                  <a:srgbClr val="1A1A2E"/>
+                </a:solidFill>
+                <a:latin typeface="Calibri"/>
+              </a:defRPr>
+            </a:pPr>
+            <a:r>
+              <a:t>Demo: Multi-Channel Scoreboards</a:t>
+            </a:r>
+          </a:p>
+        </p:txBody>
+      </p:sp>
+      <p:sp>
+        <p:nvSpPr>
+          <p:cNvPr id="3" name="TextBox 2"/>
+          <p:cNvSpPr txBox="1"/>
+          <p:nvPr/>
+        </p:nvSpPr>
+        <p:spPr>
+          <a:xfrm>
+            <a:off x="548640" y="1051560"/>
+            <a:ext cx="11064240" cy="914400"/>
+          </a:xfrm>
+          <a:prstGeom prst="rect">
+            <a:avLst/>
+          </a:prstGeom>
+          <a:solidFill>
+            <a:srgbClr val="F4F4F4"/>
+          </a:solidFill>
+        </p:spPr>
+        <p:txBody>
+          <a:bodyPr wrap="square">
+            <a:noAutofit/>
+          </a:bodyPr>
+          <a:lstStyle/>
+          <a:p>
+            <a:pPr>
+              <a:lnSpc>
+                <a:spcPts val="2200"/>
+              </a:lnSpc>
+              <a:spcAft>
+                <a:spcPts val="200"/>
+              </a:spcAft>
+              <a:defRPr sz="2000" b="0">
+                <a:solidFill>
+                  <a:srgbClr val="333333"/>
+                </a:solidFill>
+                <a:latin typeface="Consolas"/>
+              </a:defRPr>
+            </a:pPr>
+            <a:r>
+              <a:t>$ ./scripts/module6.sh --scoreboards</a:t>
+            </a:r>
+          </a:p>
+        </p:txBody>
+      </p:sp>
+      <p:pic>
+        <p:nvPicPr>
+          <p:cNvPr id="4" name="Picture 3" descr="ex05_scoreboards.png"/>
+          <p:cNvPicPr>
+            <a:picLocks noChangeAspect="1"/>
+          </p:cNvPicPr>
+          <p:nvPr/>
+        </p:nvPicPr>
+        <p:blipFill>
+          <a:blip r:embed="rId2"/>
+          <a:stretch>
+            <a:fillRect/>
+          </a:stretch>
+        </p:blipFill>
+        <p:spPr>
+          <a:xfrm>
+            <a:off x="548640" y="1965960"/>
+            <a:ext cx="7071358" cy="3977639"/>
+          </a:xfrm>
+          <a:prstGeom prst="rect">
+            <a:avLst/>
+          </a:prstGeom>
+        </p:spPr>
+      </p:pic>
+      <p:sp>
+        <p:nvSpPr>
+          <p:cNvPr id="5" name="TextBox 4"/>
+          <p:cNvSpPr txBox="1"/>
+          <p:nvPr/>
+        </p:nvSpPr>
+        <p:spPr>
+          <a:xfrm>
+            <a:off x="548640" y="6355080"/>
+            <a:ext cx="11064240" cy="320040"/>
+          </a:xfrm>
+          <a:prstGeom prst="rect">
+            <a:avLst/>
+          </a:prstGeom>
+          <a:noFill/>
+        </p:spPr>
+        <p:txBody>
+          <a:bodyPr wrap="square">
+            <a:noAutofit/>
+          </a:bodyPr>
+          <a:lstStyle/>
+          <a:p>
+            <a:pPr algn="r">
+              <a:lnSpc>
+                <a:spcPts val="2200"/>
+              </a:lnSpc>
+              <a:defRPr sz="1000" b="0">
+                <a:solidFill>
+                  <a:srgbClr val="666666"/>
+                </a:solidFill>
+                <a:latin typeface="Calibri"/>
+              </a:defRPr>
+            </a:pPr>
+            <a:r>
+              <a:t>learn_uvm2017_sv_verilator / Module 6</a:t>
+            </a:r>
+          </a:p>
+        </p:txBody>
+      </p:sp>
+    </p:spTree>
+  </p:cSld>
+  <p:clrMapOvr>
+    <a:masterClrMapping/>
+  </p:clrMapOvr>
+</p:sld>
+</file>
+
+<file path=ppt/slides/slide79.xml><?xml version="1.0" encoding="utf-8"?>
+<p:sld xmlns:a="http://schemas.openxmlformats.org/drawingml/2006/main" xmlns:p="http://schemas.openxmlformats.org/presentationml/2006/main" xmlns:r="http://schemas.openxmlformats.org/officeDocument/2006/relationships">
+  <p:cSld>
+    <p:spTree>
+      <p:nvGrpSpPr>
+        <p:cNvPr id="1" name=""/>
+        <p:cNvGrpSpPr/>
+        <p:nvPr/>
+      </p:nvGrpSpPr>
+      <p:grpSpPr/>
+      <p:sp>
+        <p:nvSpPr>
+          <p:cNvPr id="2" name="TextBox 1"/>
+          <p:cNvSpPr txBox="1"/>
+          <p:nvPr/>
+        </p:nvSpPr>
+        <p:spPr>
+          <a:xfrm>
+            <a:off x="548640" y="2743200"/>
+            <a:ext cx="11064240" cy="1371600"/>
+          </a:xfrm>
+          <a:prstGeom prst="rect">
+            <a:avLst/>
+          </a:prstGeom>
+          <a:noFill/>
+        </p:spPr>
+        <p:txBody>
+          <a:bodyPr wrap="square">
+            <a:noAutofit/>
+          </a:bodyPr>
+          <a:lstStyle/>
+          <a:p>
+            <a:pPr algn="ctr">
+              <a:lnSpc>
+                <a:spcPts val="2200"/>
+              </a:lnSpc>
+              <a:defRPr sz="3600" b="1">
+                <a:solidFill>
+                  <a:srgbClr val="1A1A2E"/>
+                </a:solidFill>
+                <a:latin typeface="Calibri"/>
+              </a:defRPr>
+            </a:pPr>
+            <a:r>
+              <a:t>Practice &amp; assessment</a:t>
+            </a:r>
+          </a:p>
+        </p:txBody>
+      </p:sp>
+      <p:sp>
+        <p:nvSpPr>
+          <p:cNvPr id="3" name="TextBox 2"/>
           <p:cNvSpPr txBox="1"/>
           <p:nvPr/>
         </p:nvSpPr>
@@ -25348,6 +27543,1133 @@
             </a:pPr>
             <a:r>
               <a:t>• Clean component hierarchy</a:t>
+            </a:r>
+          </a:p>
+        </p:txBody>
+      </p:sp>
+      <p:sp>
+        <p:nvSpPr>
+          <p:cNvPr id="4" name="TextBox 3"/>
+          <p:cNvSpPr txBox="1"/>
+          <p:nvPr/>
+        </p:nvSpPr>
+        <p:spPr>
+          <a:xfrm>
+            <a:off x="548640" y="6355080"/>
+            <a:ext cx="11064240" cy="320040"/>
+          </a:xfrm>
+          <a:prstGeom prst="rect">
+            <a:avLst/>
+          </a:prstGeom>
+          <a:noFill/>
+        </p:spPr>
+        <p:txBody>
+          <a:bodyPr wrap="square">
+            <a:noAutofit/>
+          </a:bodyPr>
+          <a:lstStyle/>
+          <a:p>
+            <a:pPr algn="r">
+              <a:lnSpc>
+                <a:spcPts val="2200"/>
+              </a:lnSpc>
+              <a:defRPr sz="1000" b="0">
+                <a:solidFill>
+                  <a:srgbClr val="666666"/>
+                </a:solidFill>
+                <a:latin typeface="Calibri"/>
+              </a:defRPr>
+            </a:pPr>
+            <a:r>
+              <a:t>learn_uvm2017_sv_verilator / Module 6</a:t>
+            </a:r>
+          </a:p>
+        </p:txBody>
+      </p:sp>
+    </p:spTree>
+  </p:cSld>
+  <p:clrMapOvr>
+    <a:masterClrMapping/>
+  </p:clrMapOvr>
+</p:sld>
+</file>
+
+<file path=ppt/slides/slide80.xml><?xml version="1.0" encoding="utf-8"?>
+<p:sld xmlns:a="http://schemas.openxmlformats.org/drawingml/2006/main" xmlns:p="http://schemas.openxmlformats.org/presentationml/2006/main" xmlns:r="http://schemas.openxmlformats.org/officeDocument/2006/relationships">
+  <p:cSld>
+    <p:spTree>
+      <p:nvGrpSpPr>
+        <p:cNvPr id="1" name=""/>
+        <p:cNvGrpSpPr/>
+        <p:nvPr/>
+      </p:nvGrpSpPr>
+      <p:grpSpPr/>
+      <p:sp>
+        <p:nvSpPr>
+          <p:cNvPr id="2" name="TextBox 1"/>
+          <p:cNvSpPr txBox="1"/>
+          <p:nvPr/>
+        </p:nvSpPr>
+        <p:spPr>
+          <a:xfrm>
+            <a:off x="548640" y="411480"/>
+            <a:ext cx="11064240" cy="777240"/>
+          </a:xfrm>
+          <a:prstGeom prst="rect">
+            <a:avLst/>
+          </a:prstGeom>
+          <a:noFill/>
+        </p:spPr>
+        <p:txBody>
+          <a:bodyPr wrap="square">
+            <a:noAutofit/>
+          </a:bodyPr>
+          <a:lstStyle/>
+          <a:p>
+            <a:pPr>
+              <a:lnSpc>
+                <a:spcPts val="2200"/>
+              </a:lnSpc>
+              <a:defRPr sz="2800" b="1">
+                <a:solidFill>
+                  <a:srgbClr val="1A1A2E"/>
+                </a:solidFill>
+                <a:latin typeface="Calibri"/>
+              </a:defRPr>
+            </a:pPr>
+            <a:r>
+              <a:t>What you should know (1/2)</a:t>
+            </a:r>
+          </a:p>
+        </p:txBody>
+      </p:sp>
+      <p:sp>
+        <p:nvSpPr>
+          <p:cNvPr id="3" name="TextBox 2"/>
+          <p:cNvSpPr txBox="1"/>
+          <p:nvPr/>
+        </p:nvSpPr>
+        <p:spPr>
+          <a:xfrm>
+            <a:off x="548640" y="1234440"/>
+            <a:ext cx="11064240" cy="4937760"/>
+          </a:xfrm>
+          <a:prstGeom prst="rect">
+            <a:avLst/>
+          </a:prstGeom>
+          <a:noFill/>
+        </p:spPr>
+        <p:txBody>
+          <a:bodyPr wrap="square">
+            <a:noAutofit/>
+          </a:bodyPr>
+          <a:lstStyle/>
+          <a:p>
+            <a:pPr>
+              <a:lnSpc>
+                <a:spcPts val="2200"/>
+              </a:lnSpc>
+              <a:spcAft>
+                <a:spcPts val="1000"/>
+              </a:spcAft>
+              <a:defRPr sz="2000" b="0">
+                <a:solidFill>
+                  <a:srgbClr val="333333"/>
+                </a:solidFill>
+                <a:latin typeface="Calibri"/>
+              </a:defRPr>
+            </a:pPr>
+            <a:r>
+              <a:t>• Design complex testbench architectures with</a:t>
+            </a:r>
+          </a:p>
+          <a:p>
+            <a:pPr>
+              <a:lnSpc>
+                <a:spcPts val="2200"/>
+              </a:lnSpc>
+              <a:spcAft>
+                <a:spcPts val="1000"/>
+              </a:spcAft>
+              <a:defRPr sz="2000" b="0">
+                <a:solidFill>
+                  <a:srgbClr val="333333"/>
+                </a:solidFill>
+                <a:latin typeface="Calibri"/>
+              </a:defRPr>
+            </a:pPr>
+            <a:r>
+              <a:t>      hierarchical component organization</a:t>
+            </a:r>
+          </a:p>
+          <a:p>
+            <a:pPr>
+              <a:lnSpc>
+                <a:spcPts val="2200"/>
+              </a:lnSpc>
+              <a:spcAft>
+                <a:spcPts val="1000"/>
+              </a:spcAft>
+              <a:defRPr sz="2000" b="0">
+                <a:solidFill>
+                  <a:srgbClr val="333333"/>
+                </a:solidFill>
+                <a:latin typeface="Calibri"/>
+              </a:defRPr>
+            </a:pPr>
+            <a:r>
+              <a:t>• Coordinate multiple agents using virtual sequences</a:t>
+            </a:r>
+          </a:p>
+          <a:p>
+            <a:pPr>
+              <a:lnSpc>
+                <a:spcPts val="2200"/>
+              </a:lnSpc>
+              <a:spcAft>
+                <a:spcPts val="1000"/>
+              </a:spcAft>
+              <a:defRPr sz="2000" b="0">
+                <a:solidFill>
+                  <a:srgbClr val="333333"/>
+                </a:solidFill>
+                <a:latin typeface="Calibri"/>
+              </a:defRPr>
+            </a:pPr>
+            <a:r>
+              <a:t>• Verify protocols using protocol-shaped drivers and</a:t>
+            </a:r>
+          </a:p>
+          <a:p>
+            <a:pPr>
+              <a:lnSpc>
+                <a:spcPts val="2200"/>
+              </a:lnSpc>
+              <a:spcAft>
+                <a:spcPts val="1000"/>
+              </a:spcAft>
+              <a:defRPr sz="2000" b="0">
+                <a:solidFill>
+                  <a:srgbClr val="333333"/>
+                </a:solidFill>
+                <a:latin typeface="Calibri"/>
+              </a:defRPr>
+            </a:pPr>
+            <a:r>
+              <a:t>      monitors</a:t>
+            </a:r>
+          </a:p>
+          <a:p>
+            <a:pPr>
+              <a:lnSpc>
+                <a:spcPts val="2200"/>
+              </a:lnSpc>
+              <a:spcAft>
+                <a:spcPts val="1000"/>
+              </a:spcAft>
+              <a:defRPr sz="2000" b="0">
+                <a:solidFill>
+                  <a:srgbClr val="333333"/>
+                </a:solidFill>
+                <a:latin typeface="Calibri"/>
+              </a:defRPr>
+            </a:pPr>
+            <a:r>
+              <a:t>• Implement protocol checkers for compliance</a:t>
+            </a:r>
+          </a:p>
+          <a:p>
+            <a:pPr>
+              <a:lnSpc>
+                <a:spcPts val="2200"/>
+              </a:lnSpc>
+              <a:spcAft>
+                <a:spcPts val="1000"/>
+              </a:spcAft>
+              <a:defRPr sz="2000" b="0">
+                <a:solidFill>
+                  <a:srgbClr val="333333"/>
+                </a:solidFill>
+                <a:latin typeface="Calibri"/>
+              </a:defRPr>
+            </a:pPr>
+            <a:r>
+              <a:t>      verification</a:t>
+            </a:r>
+          </a:p>
+          <a:p>
+            <a:pPr>
+              <a:lnSpc>
+                <a:spcPts val="2200"/>
+              </a:lnSpc>
+              <a:spcAft>
+                <a:spcPts val="1000"/>
+              </a:spcAft>
+              <a:defRPr sz="2000" b="0">
+                <a:solidFill>
+                  <a:srgbClr val="333333"/>
+                </a:solidFill>
+                <a:latin typeface="Calibri"/>
+              </a:defRPr>
+            </a:pPr>
+            <a:r>
+              <a:t>• Build multi-channel scoreboards for transaction</a:t>
+            </a:r>
+          </a:p>
+          <a:p>
+            <a:pPr>
+              <a:lnSpc>
+                <a:spcPts val="2200"/>
+              </a:lnSpc>
+              <a:spcAft>
+                <a:spcPts val="1000"/>
+              </a:spcAft>
+              <a:defRPr sz="2000" b="0">
+                <a:solidFill>
+                  <a:srgbClr val="333333"/>
+                </a:solidFill>
+                <a:latin typeface="Calibri"/>
+              </a:defRPr>
+            </a:pPr>
+            <a:r>
+              <a:t>      matching</a:t>
+            </a:r>
+          </a:p>
+          <a:p>
+            <a:pPr>
+              <a:lnSpc>
+                <a:spcPts val="2200"/>
+              </a:lnSpc>
+              <a:spcAft>
+                <a:spcPts val="1000"/>
+              </a:spcAft>
+              <a:defRPr sz="2000" b="0">
+                <a:solidFill>
+                  <a:srgbClr val="333333"/>
+                </a:solidFill>
+                <a:latin typeface="Calibri"/>
+              </a:defRPr>
+            </a:pPr>
+            <a:r>
+              <a:t>• Apply production-quality testbench patterns</a:t>
+            </a:r>
+          </a:p>
+        </p:txBody>
+      </p:sp>
+      <p:sp>
+        <p:nvSpPr>
+          <p:cNvPr id="4" name="TextBox 3"/>
+          <p:cNvSpPr txBox="1"/>
+          <p:nvPr/>
+        </p:nvSpPr>
+        <p:spPr>
+          <a:xfrm>
+            <a:off x="548640" y="6355080"/>
+            <a:ext cx="11064240" cy="320040"/>
+          </a:xfrm>
+          <a:prstGeom prst="rect">
+            <a:avLst/>
+          </a:prstGeom>
+          <a:noFill/>
+        </p:spPr>
+        <p:txBody>
+          <a:bodyPr wrap="square">
+            <a:noAutofit/>
+          </a:bodyPr>
+          <a:lstStyle/>
+          <a:p>
+            <a:pPr algn="r">
+              <a:lnSpc>
+                <a:spcPts val="2200"/>
+              </a:lnSpc>
+              <a:defRPr sz="1000" b="0">
+                <a:solidFill>
+                  <a:srgbClr val="666666"/>
+                </a:solidFill>
+                <a:latin typeface="Calibri"/>
+              </a:defRPr>
+            </a:pPr>
+            <a:r>
+              <a:t>learn_uvm2017_sv_verilator / Module 6</a:t>
+            </a:r>
+          </a:p>
+        </p:txBody>
+      </p:sp>
+    </p:spTree>
+  </p:cSld>
+  <p:clrMapOvr>
+    <a:masterClrMapping/>
+  </p:clrMapOvr>
+</p:sld>
+</file>
+
+<file path=ppt/slides/slide81.xml><?xml version="1.0" encoding="utf-8"?>
+<p:sld xmlns:a="http://schemas.openxmlformats.org/drawingml/2006/main" xmlns:p="http://schemas.openxmlformats.org/presentationml/2006/main" xmlns:r="http://schemas.openxmlformats.org/officeDocument/2006/relationships">
+  <p:cSld>
+    <p:spTree>
+      <p:nvGrpSpPr>
+        <p:cNvPr id="1" name=""/>
+        <p:cNvGrpSpPr/>
+        <p:nvPr/>
+      </p:nvGrpSpPr>
+      <p:grpSpPr/>
+      <p:sp>
+        <p:nvSpPr>
+          <p:cNvPr id="2" name="TextBox 1"/>
+          <p:cNvSpPr txBox="1"/>
+          <p:nvPr/>
+        </p:nvSpPr>
+        <p:spPr>
+          <a:xfrm>
+            <a:off x="548640" y="411480"/>
+            <a:ext cx="11064240" cy="777240"/>
+          </a:xfrm>
+          <a:prstGeom prst="rect">
+            <a:avLst/>
+          </a:prstGeom>
+          <a:noFill/>
+        </p:spPr>
+        <p:txBody>
+          <a:bodyPr wrap="square">
+            <a:noAutofit/>
+          </a:bodyPr>
+          <a:lstStyle/>
+          <a:p>
+            <a:pPr>
+              <a:lnSpc>
+                <a:spcPts val="2200"/>
+              </a:lnSpc>
+              <a:defRPr sz="2800" b="1">
+                <a:solidFill>
+                  <a:srgbClr val="1A1A2E"/>
+                </a:solidFill>
+                <a:latin typeface="Calibri"/>
+              </a:defRPr>
+            </a:pPr>
+            <a:r>
+              <a:t>What you should know (2/2)</a:t>
+            </a:r>
+          </a:p>
+        </p:txBody>
+      </p:sp>
+      <p:sp>
+        <p:nvSpPr>
+          <p:cNvPr id="3" name="TextBox 2"/>
+          <p:cNvSpPr txBox="1"/>
+          <p:nvPr/>
+        </p:nvSpPr>
+        <p:spPr>
+          <a:xfrm>
+            <a:off x="548640" y="1234440"/>
+            <a:ext cx="11064240" cy="4937760"/>
+          </a:xfrm>
+          <a:prstGeom prst="rect">
+            <a:avLst/>
+          </a:prstGeom>
+          <a:noFill/>
+        </p:spPr>
+        <p:txBody>
+          <a:bodyPr wrap="square">
+            <a:noAutofit/>
+          </a:bodyPr>
+          <a:lstStyle/>
+          <a:p>
+            <a:pPr>
+              <a:lnSpc>
+                <a:spcPts val="2200"/>
+              </a:lnSpc>
+              <a:spcAft>
+                <a:spcPts val="1000"/>
+              </a:spcAft>
+              <a:defRPr sz="2000" b="0">
+                <a:solidFill>
+                  <a:srgbClr val="333333"/>
+                </a:solidFill>
+                <a:latin typeface="Calibri"/>
+              </a:defRPr>
+            </a:pPr>
+            <a:r>
+              <a:t>• Create reusable verification components</a:t>
+            </a:r>
+          </a:p>
+          <a:p>
+            <a:pPr>
+              <a:lnSpc>
+                <a:spcPts val="2200"/>
+              </a:lnSpc>
+              <a:spcAft>
+                <a:spcPts val="1000"/>
+              </a:spcAft>
+              <a:defRPr sz="2000" b="0">
+                <a:solidFill>
+                  <a:srgbClr val="333333"/>
+                </a:solidFill>
+                <a:latin typeface="Calibri"/>
+              </a:defRPr>
+            </a:pPr>
+            <a:r>
+              <a:t>• Structure testbenches for maintainability and</a:t>
+            </a:r>
+          </a:p>
+          <a:p>
+            <a:pPr>
+              <a:lnSpc>
+                <a:spcPts val="2200"/>
+              </a:lnSpc>
+              <a:spcAft>
+                <a:spcPts val="1000"/>
+              </a:spcAft>
+              <a:defRPr sz="2000" b="0">
+                <a:solidFill>
+                  <a:srgbClr val="333333"/>
+                </a:solidFill>
+                <a:latin typeface="Calibri"/>
+              </a:defRPr>
+            </a:pPr>
+            <a:r>
+              <a:t>      scalability</a:t>
+            </a:r>
+          </a:p>
+        </p:txBody>
+      </p:sp>
+      <p:sp>
+        <p:nvSpPr>
+          <p:cNvPr id="4" name="TextBox 3"/>
+          <p:cNvSpPr txBox="1"/>
+          <p:nvPr/>
+        </p:nvSpPr>
+        <p:spPr>
+          <a:xfrm>
+            <a:off x="548640" y="6355080"/>
+            <a:ext cx="11064240" cy="320040"/>
+          </a:xfrm>
+          <a:prstGeom prst="rect">
+            <a:avLst/>
+          </a:prstGeom>
+          <a:noFill/>
+        </p:spPr>
+        <p:txBody>
+          <a:bodyPr wrap="square">
+            <a:noAutofit/>
+          </a:bodyPr>
+          <a:lstStyle/>
+          <a:p>
+            <a:pPr algn="r">
+              <a:lnSpc>
+                <a:spcPts val="2200"/>
+              </a:lnSpc>
+              <a:defRPr sz="1000" b="0">
+                <a:solidFill>
+                  <a:srgbClr val="666666"/>
+                </a:solidFill>
+                <a:latin typeface="Calibri"/>
+              </a:defRPr>
+            </a:pPr>
+            <a:r>
+              <a:t>learn_uvm2017_sv_verilator / Module 6</a:t>
+            </a:r>
+          </a:p>
+        </p:txBody>
+      </p:sp>
+    </p:spTree>
+  </p:cSld>
+  <p:clrMapOvr>
+    <a:masterClrMapping/>
+  </p:clrMapOvr>
+</p:sld>
+</file>
+
+<file path=ppt/slides/slide82.xml><?xml version="1.0" encoding="utf-8"?>
+<p:sld xmlns:a="http://schemas.openxmlformats.org/drawingml/2006/main" xmlns:p="http://schemas.openxmlformats.org/presentationml/2006/main" xmlns:r="http://schemas.openxmlformats.org/officeDocument/2006/relationships">
+  <p:cSld>
+    <p:spTree>
+      <p:nvGrpSpPr>
+        <p:cNvPr id="1" name=""/>
+        <p:cNvGrpSpPr/>
+        <p:nvPr/>
+      </p:nvGrpSpPr>
+      <p:grpSpPr/>
+      <p:sp>
+        <p:nvSpPr>
+          <p:cNvPr id="2" name="TextBox 1"/>
+          <p:cNvSpPr txBox="1"/>
+          <p:nvPr/>
+        </p:nvSpPr>
+        <p:spPr>
+          <a:xfrm>
+            <a:off x="548640" y="411480"/>
+            <a:ext cx="11064240" cy="777240"/>
+          </a:xfrm>
+          <a:prstGeom prst="rect">
+            <a:avLst/>
+          </a:prstGeom>
+          <a:noFill/>
+        </p:spPr>
+        <p:txBody>
+          <a:bodyPr wrap="square">
+            <a:noAutofit/>
+          </a:bodyPr>
+          <a:lstStyle/>
+          <a:p>
+            <a:pPr>
+              <a:lnSpc>
+                <a:spcPts val="2200"/>
+              </a:lnSpc>
+              <a:defRPr sz="2800" b="1">
+                <a:solidFill>
+                  <a:srgbClr val="1A1A2E"/>
+                </a:solidFill>
+                <a:latin typeface="Calibri"/>
+              </a:defRPr>
+            </a:pPr>
+            <a:r>
+              <a:t>Exercises</a:t>
+            </a:r>
+          </a:p>
+        </p:txBody>
+      </p:sp>
+      <p:sp>
+        <p:nvSpPr>
+          <p:cNvPr id="3" name="TextBox 2"/>
+          <p:cNvSpPr txBox="1"/>
+          <p:nvPr/>
+        </p:nvSpPr>
+        <p:spPr>
+          <a:xfrm>
+            <a:off x="548640" y="1234440"/>
+            <a:ext cx="11064240" cy="4937760"/>
+          </a:xfrm>
+          <a:prstGeom prst="rect">
+            <a:avLst/>
+          </a:prstGeom>
+          <a:noFill/>
+        </p:spPr>
+        <p:txBody>
+          <a:bodyPr wrap="square">
+            <a:noAutofit/>
+          </a:bodyPr>
+          <a:lstStyle/>
+          <a:p>
+            <a:pPr>
+              <a:lnSpc>
+                <a:spcPts val="2200"/>
+              </a:lnSpc>
+              <a:spcAft>
+                <a:spcPts val="1000"/>
+              </a:spcAft>
+              <a:defRPr sz="2000" b="0">
+                <a:solidFill>
+                  <a:srgbClr val="333333"/>
+                </a:solidFill>
+                <a:latin typeface="Calibri"/>
+              </a:defRPr>
+            </a:pPr>
+            <a:r>
+              <a:t>• Testbench Architecture</a:t>
+            </a:r>
+          </a:p>
+          <a:p>
+            <a:pPr>
+              <a:lnSpc>
+                <a:spcPts val="2200"/>
+              </a:lnSpc>
+              <a:spcAft>
+                <a:spcPts val="1000"/>
+              </a:spcAft>
+              <a:defRPr sz="2000" b="0">
+                <a:solidFill>
+                  <a:srgbClr val="333333"/>
+                </a:solidFill>
+                <a:latin typeface="Calibri"/>
+              </a:defRPr>
+            </a:pPr>
+            <a:r>
+              <a:t>• Multi-Agent Coordination</a:t>
+            </a:r>
+          </a:p>
+          <a:p>
+            <a:pPr>
+              <a:lnSpc>
+                <a:spcPts val="2200"/>
+              </a:lnSpc>
+              <a:spcAft>
+                <a:spcPts val="1000"/>
+              </a:spcAft>
+              <a:defRPr sz="2000" b="0">
+                <a:solidFill>
+                  <a:srgbClr val="333333"/>
+                </a:solidFill>
+                <a:latin typeface="Calibri"/>
+              </a:defRPr>
+            </a:pPr>
+            <a:r>
+              <a:t>• Protocol Verification</a:t>
+            </a:r>
+          </a:p>
+          <a:p>
+            <a:pPr>
+              <a:lnSpc>
+                <a:spcPts val="2200"/>
+              </a:lnSpc>
+              <a:spcAft>
+                <a:spcPts val="1000"/>
+              </a:spcAft>
+              <a:defRPr sz="2000" b="0">
+                <a:solidFill>
+                  <a:srgbClr val="333333"/>
+                </a:solidFill>
+                <a:latin typeface="Calibri"/>
+              </a:defRPr>
+            </a:pPr>
+            <a:r>
+              <a:t>• Protocol Checkers</a:t>
+            </a:r>
+          </a:p>
+          <a:p>
+            <a:pPr>
+              <a:lnSpc>
+                <a:spcPts val="2200"/>
+              </a:lnSpc>
+              <a:spcAft>
+                <a:spcPts val="1000"/>
+              </a:spcAft>
+              <a:defRPr sz="2000" b="0">
+                <a:solidFill>
+                  <a:srgbClr val="333333"/>
+                </a:solidFill>
+                <a:latin typeface="Calibri"/>
+              </a:defRPr>
+            </a:pPr>
+            <a:r>
+              <a:t>• Multi-Channel Scoreboards</a:t>
+            </a:r>
+          </a:p>
+        </p:txBody>
+      </p:sp>
+      <p:sp>
+        <p:nvSpPr>
+          <p:cNvPr id="4" name="TextBox 3"/>
+          <p:cNvSpPr txBox="1"/>
+          <p:nvPr/>
+        </p:nvSpPr>
+        <p:spPr>
+          <a:xfrm>
+            <a:off x="548640" y="6355080"/>
+            <a:ext cx="11064240" cy="320040"/>
+          </a:xfrm>
+          <a:prstGeom prst="rect">
+            <a:avLst/>
+          </a:prstGeom>
+          <a:noFill/>
+        </p:spPr>
+        <p:txBody>
+          <a:bodyPr wrap="square">
+            <a:noAutofit/>
+          </a:bodyPr>
+          <a:lstStyle/>
+          <a:p>
+            <a:pPr algn="r">
+              <a:lnSpc>
+                <a:spcPts val="2200"/>
+              </a:lnSpc>
+              <a:defRPr sz="1000" b="0">
+                <a:solidFill>
+                  <a:srgbClr val="666666"/>
+                </a:solidFill>
+                <a:latin typeface="Calibri"/>
+              </a:defRPr>
+            </a:pPr>
+            <a:r>
+              <a:t>learn_uvm2017_sv_verilator / Module 6</a:t>
+            </a:r>
+          </a:p>
+        </p:txBody>
+      </p:sp>
+    </p:spTree>
+  </p:cSld>
+  <p:clrMapOvr>
+    <a:masterClrMapping/>
+  </p:clrMapOvr>
+</p:sld>
+</file>
+
+<file path=ppt/slides/slide83.xml><?xml version="1.0" encoding="utf-8"?>
+<p:sld xmlns:a="http://schemas.openxmlformats.org/drawingml/2006/main" xmlns:p="http://schemas.openxmlformats.org/presentationml/2006/main" xmlns:r="http://schemas.openxmlformats.org/officeDocument/2006/relationships">
+  <p:cSld>
+    <p:spTree>
+      <p:nvGrpSpPr>
+        <p:cNvPr id="1" name=""/>
+        <p:cNvGrpSpPr/>
+        <p:nvPr/>
+      </p:nvGrpSpPr>
+      <p:grpSpPr/>
+      <p:sp>
+        <p:nvSpPr>
+          <p:cNvPr id="2" name="TextBox 1"/>
+          <p:cNvSpPr txBox="1"/>
+          <p:nvPr/>
+        </p:nvSpPr>
+        <p:spPr>
+          <a:xfrm>
+            <a:off x="548640" y="411480"/>
+            <a:ext cx="11064240" cy="777240"/>
+          </a:xfrm>
+          <a:prstGeom prst="rect">
+            <a:avLst/>
+          </a:prstGeom>
+          <a:noFill/>
+        </p:spPr>
+        <p:txBody>
+          <a:bodyPr wrap="square">
+            <a:noAutofit/>
+          </a:bodyPr>
+          <a:lstStyle/>
+          <a:p>
+            <a:pPr>
+              <a:lnSpc>
+                <a:spcPts val="2200"/>
+              </a:lnSpc>
+              <a:defRPr sz="2800" b="1">
+                <a:solidFill>
+                  <a:srgbClr val="1A1A2E"/>
+                </a:solidFill>
+                <a:latin typeface="Calibri"/>
+              </a:defRPr>
+            </a:pPr>
+            <a:r>
+              <a:t>Assessment checklist</a:t>
+            </a:r>
+          </a:p>
+        </p:txBody>
+      </p:sp>
+      <p:sp>
+        <p:nvSpPr>
+          <p:cNvPr id="3" name="TextBox 2"/>
+          <p:cNvSpPr txBox="1"/>
+          <p:nvPr/>
+        </p:nvSpPr>
+        <p:spPr>
+          <a:xfrm>
+            <a:off x="548640" y="1234440"/>
+            <a:ext cx="11064240" cy="4937760"/>
+          </a:xfrm>
+          <a:prstGeom prst="rect">
+            <a:avLst/>
+          </a:prstGeom>
+          <a:noFill/>
+        </p:spPr>
+        <p:txBody>
+          <a:bodyPr wrap="square">
+            <a:noAutofit/>
+          </a:bodyPr>
+          <a:lstStyle/>
+          <a:p>
+            <a:pPr>
+              <a:lnSpc>
+                <a:spcPts val="2200"/>
+              </a:lnSpc>
+              <a:spcAft>
+                <a:spcPts val="1000"/>
+              </a:spcAft>
+              <a:defRPr sz="2000" b="0">
+                <a:solidFill>
+                  <a:srgbClr val="333333"/>
+                </a:solidFill>
+                <a:latin typeface="Calibri"/>
+              </a:defRPr>
+            </a:pPr>
+            <a:r>
+              <a:t>• Can design complex testbench architectures</a:t>
+            </a:r>
+          </a:p>
+          <a:p>
+            <a:pPr>
+              <a:lnSpc>
+                <a:spcPts val="2200"/>
+              </a:lnSpc>
+              <a:spcAft>
+                <a:spcPts val="1000"/>
+              </a:spcAft>
+              <a:defRPr sz="2000" b="0">
+                <a:solidFill>
+                  <a:srgbClr val="333333"/>
+                </a:solidFill>
+                <a:latin typeface="Calibri"/>
+              </a:defRPr>
+            </a:pPr>
+            <a:r>
+              <a:t>• Can coordinate multiple agents</a:t>
+            </a:r>
+          </a:p>
+          <a:p>
+            <a:pPr>
+              <a:lnSpc>
+                <a:spcPts val="2200"/>
+              </a:lnSpc>
+              <a:spcAft>
+                <a:spcPts val="1000"/>
+              </a:spcAft>
+              <a:defRPr sz="2000" b="0">
+                <a:solidFill>
+                  <a:srgbClr val="333333"/>
+                </a:solidFill>
+                <a:latin typeface="Calibri"/>
+              </a:defRPr>
+            </a:pPr>
+            <a:r>
+              <a:t>• Can verify protocols</a:t>
+            </a:r>
+          </a:p>
+          <a:p>
+            <a:pPr>
+              <a:lnSpc>
+                <a:spcPts val="2200"/>
+              </a:lnSpc>
+              <a:spcAft>
+                <a:spcPts val="1000"/>
+              </a:spcAft>
+              <a:defRPr sz="2000" b="0">
+                <a:solidFill>
+                  <a:srgbClr val="333333"/>
+                </a:solidFill>
+                <a:latin typeface="Calibri"/>
+              </a:defRPr>
+            </a:pPr>
+            <a:r>
+              <a:t>• Can implement protocol checkers</a:t>
+            </a:r>
+          </a:p>
+          <a:p>
+            <a:pPr>
+              <a:lnSpc>
+                <a:spcPts val="2200"/>
+              </a:lnSpc>
+              <a:spcAft>
+                <a:spcPts val="1000"/>
+              </a:spcAft>
+              <a:defRPr sz="2000" b="0">
+                <a:solidFill>
+                  <a:srgbClr val="333333"/>
+                </a:solidFill>
+                <a:latin typeface="Calibri"/>
+              </a:defRPr>
+            </a:pPr>
+            <a:r>
+              <a:t>• Can build multi-channel scoreboards</a:t>
+            </a:r>
+          </a:p>
+          <a:p>
+            <a:pPr>
+              <a:lnSpc>
+                <a:spcPts val="2200"/>
+              </a:lnSpc>
+              <a:spcAft>
+                <a:spcPts val="1000"/>
+              </a:spcAft>
+              <a:defRPr sz="2000" b="0">
+                <a:solidFill>
+                  <a:srgbClr val="333333"/>
+                </a:solidFill>
+                <a:latin typeface="Calibri"/>
+              </a:defRPr>
+            </a:pPr>
+            <a:r>
+              <a:t>• Can apply production-quality testbench patterns</a:t>
+            </a:r>
+          </a:p>
+        </p:txBody>
+      </p:sp>
+      <p:sp>
+        <p:nvSpPr>
+          <p:cNvPr id="4" name="TextBox 3"/>
+          <p:cNvSpPr txBox="1"/>
+          <p:nvPr/>
+        </p:nvSpPr>
+        <p:spPr>
+          <a:xfrm>
+            <a:off x="548640" y="6355080"/>
+            <a:ext cx="11064240" cy="320040"/>
+          </a:xfrm>
+          <a:prstGeom prst="rect">
+            <a:avLst/>
+          </a:prstGeom>
+          <a:noFill/>
+        </p:spPr>
+        <p:txBody>
+          <a:bodyPr wrap="square">
+            <a:noAutofit/>
+          </a:bodyPr>
+          <a:lstStyle/>
+          <a:p>
+            <a:pPr algn="r">
+              <a:lnSpc>
+                <a:spcPts val="2200"/>
+              </a:lnSpc>
+              <a:defRPr sz="1000" b="0">
+                <a:solidFill>
+                  <a:srgbClr val="666666"/>
+                </a:solidFill>
+                <a:latin typeface="Calibri"/>
+              </a:defRPr>
+            </a:pPr>
+            <a:r>
+              <a:t>learn_uvm2017_sv_verilator / Module 6</a:t>
+            </a:r>
+          </a:p>
+        </p:txBody>
+      </p:sp>
+    </p:spTree>
+  </p:cSld>
+  <p:clrMapOvr>
+    <a:masterClrMapping/>
+  </p:clrMapOvr>
+</p:sld>
+</file>
+
+<file path=ppt/slides/slide84.xml><?xml version="1.0" encoding="utf-8"?>
+<p:sld xmlns:a="http://schemas.openxmlformats.org/drawingml/2006/main" xmlns:p="http://schemas.openxmlformats.org/presentationml/2006/main" xmlns:r="http://schemas.openxmlformats.org/officeDocument/2006/relationships">
+  <p:cSld>
+    <p:spTree>
+      <p:nvGrpSpPr>
+        <p:cNvPr id="1" name=""/>
+        <p:cNvGrpSpPr/>
+        <p:nvPr/>
+      </p:nvGrpSpPr>
+      <p:grpSpPr/>
+      <p:sp>
+        <p:nvSpPr>
+          <p:cNvPr id="2" name="TextBox 1"/>
+          <p:cNvSpPr txBox="1"/>
+          <p:nvPr/>
+        </p:nvSpPr>
+        <p:spPr>
+          <a:xfrm>
+            <a:off x="548640" y="411480"/>
+            <a:ext cx="11064240" cy="777240"/>
+          </a:xfrm>
+          <a:prstGeom prst="rect">
+            <a:avLst/>
+          </a:prstGeom>
+          <a:noFill/>
+        </p:spPr>
+        <p:txBody>
+          <a:bodyPr wrap="square">
+            <a:noAutofit/>
+          </a:bodyPr>
+          <a:lstStyle/>
+          <a:p>
+            <a:pPr>
+              <a:lnSpc>
+                <a:spcPts val="2200"/>
+              </a:lnSpc>
+              <a:defRPr sz="2800" b="1">
+                <a:solidFill>
+                  <a:srgbClr val="1A1A2E"/>
+                </a:solidFill>
+                <a:latin typeface="Calibri"/>
+              </a:defRPr>
+            </a:pPr>
+            <a:r>
+              <a:t>Summary &amp; next steps</a:t>
+            </a:r>
+          </a:p>
+        </p:txBody>
+      </p:sp>
+      <p:sp>
+        <p:nvSpPr>
+          <p:cNvPr id="3" name="TextBox 2"/>
+          <p:cNvSpPr txBox="1"/>
+          <p:nvPr/>
+        </p:nvSpPr>
+        <p:spPr>
+          <a:xfrm>
+            <a:off x="548640" y="1234440"/>
+            <a:ext cx="11064240" cy="4937760"/>
+          </a:xfrm>
+          <a:prstGeom prst="rect">
+            <a:avLst/>
+          </a:prstGeom>
+          <a:noFill/>
+        </p:spPr>
+        <p:txBody>
+          <a:bodyPr wrap="square">
+            <a:noAutofit/>
+          </a:bodyPr>
+          <a:lstStyle/>
+          <a:p>
+            <a:pPr>
+              <a:lnSpc>
+                <a:spcPts val="2200"/>
+              </a:lnSpc>
+              <a:spcAft>
+                <a:spcPts val="1000"/>
+              </a:spcAft>
+              <a:defRPr sz="2000" b="0">
+                <a:solidFill>
+                  <a:srgbClr val="333333"/>
+                </a:solidFill>
+                <a:latin typeface="Calibri"/>
+              </a:defRPr>
+            </a:pPr>
+            <a:r>
+              <a:t>• Build production-quality multi-agent testbenches</a:t>
+            </a:r>
+          </a:p>
+          <a:p>
+            <a:pPr>
+              <a:lnSpc>
+                <a:spcPts val="2200"/>
+              </a:lnSpc>
+              <a:spcAft>
+                <a:spcPts val="1000"/>
+              </a:spcAft>
+              <a:defRPr sz="2000" b="0">
+                <a:solidFill>
+                  <a:srgbClr val="333333"/>
+                </a:solidFill>
+                <a:latin typeface="Calibri"/>
+              </a:defRPr>
+            </a:pPr>
+            <a:r>
+              <a:t>• Complete module6/CHECKLIST.md</a:t>
+            </a:r>
+          </a:p>
+          <a:p>
+            <a:pPr>
+              <a:lnSpc>
+                <a:spcPts val="2200"/>
+              </a:lnSpc>
+              <a:spcAft>
+                <a:spcPts val="1000"/>
+              </a:spcAft>
+              <a:defRPr sz="2000" b="0">
+                <a:solidFill>
+                  <a:srgbClr val="333333"/>
+                </a:solidFill>
+                <a:latin typeface="Calibri"/>
+              </a:defRPr>
+            </a:pPr>
+            <a:r>
+              <a:t>• Review module6/EXAMPLES.md and run each lab</a:t>
+            </a:r>
+          </a:p>
+          <a:p>
+            <a:pPr>
+              <a:lnSpc>
+                <a:spcPts val="2200"/>
+              </a:lnSpc>
+              <a:spcAft>
+                <a:spcPts val="1000"/>
+              </a:spcAft>
+              <a:defRPr sz="2000" b="0">
+                <a:solidFill>
+                  <a:srgbClr val="333333"/>
+                </a:solidFill>
+                <a:latin typeface="Calibri"/>
+              </a:defRPr>
+            </a:pPr>
+            <a:r>
+              <a:t>• Next: Next module in course</a:t>
             </a:r>
           </a:p>
         </p:txBody>
